--- a/docs/pptx/entire/ritu-entire-linsubhr-sens-grade2.pptx
+++ b/docs/pptx/entire/ritu-entire-linsubhr-sens-grade2.pptx
@@ -3045,612 +3045,612 @@
           </p:nvSpPr>
           <p:spPr>
             <a:xfrm>
-              <a:off x="1172049" y="3959602"/>
-              <a:ext cx="7090630" cy="1252390"/>
+              <a:off x="1172049" y="3963449"/>
+              <a:ext cx="7090630" cy="1247428"/>
             </a:xfrm>
             <a:custGeom>
               <a:avLst/>
               <a:pathLst>
-                <a:path w="7090630" h="1252390">
+                <a:path w="7090630" h="1247428">
                   <a:moveTo>
                     <a:pt x="0" y="0"/>
                   </a:moveTo>
                   <a:lnTo>
-                    <a:pt x="71622" y="24532"/>
-                  </a:lnTo>
-                  <a:lnTo>
-                    <a:pt x="143245" y="48688"/>
-                  </a:lnTo>
-                  <a:lnTo>
-                    <a:pt x="214867" y="72474"/>
-                  </a:lnTo>
-                  <a:lnTo>
-                    <a:pt x="286490" y="95894"/>
-                  </a:lnTo>
-                  <a:lnTo>
-                    <a:pt x="358112" y="118954"/>
-                  </a:lnTo>
-                  <a:lnTo>
-                    <a:pt x="429735" y="141660"/>
-                  </a:lnTo>
-                  <a:lnTo>
-                    <a:pt x="501357" y="164018"/>
-                  </a:lnTo>
-                  <a:lnTo>
-                    <a:pt x="572980" y="186032"/>
-                  </a:lnTo>
-                  <a:lnTo>
-                    <a:pt x="644602" y="207708"/>
-                  </a:lnTo>
-                  <a:lnTo>
-                    <a:pt x="716225" y="229052"/>
-                  </a:lnTo>
-                  <a:lnTo>
-                    <a:pt x="787847" y="250067"/>
-                  </a:lnTo>
-                  <a:lnTo>
-                    <a:pt x="859470" y="270760"/>
-                  </a:lnTo>
-                  <a:lnTo>
-                    <a:pt x="931092" y="291135"/>
-                  </a:lnTo>
-                  <a:lnTo>
-                    <a:pt x="1002715" y="311198"/>
-                  </a:lnTo>
-                  <a:lnTo>
-                    <a:pt x="1074337" y="330952"/>
-                  </a:lnTo>
-                  <a:lnTo>
-                    <a:pt x="1145960" y="350403"/>
-                  </a:lnTo>
-                  <a:lnTo>
-                    <a:pt x="1217582" y="369555"/>
-                  </a:lnTo>
-                  <a:lnTo>
-                    <a:pt x="1289205" y="388413"/>
-                  </a:lnTo>
-                  <a:lnTo>
-                    <a:pt x="1360827" y="406982"/>
-                  </a:lnTo>
-                  <a:lnTo>
-                    <a:pt x="1432450" y="425265"/>
-                  </a:lnTo>
-                  <a:lnTo>
-                    <a:pt x="1504073" y="443268"/>
-                  </a:lnTo>
-                  <a:lnTo>
-                    <a:pt x="1575695" y="460994"/>
-                  </a:lnTo>
-                  <a:lnTo>
-                    <a:pt x="1647318" y="478448"/>
-                  </a:lnTo>
-                  <a:lnTo>
-                    <a:pt x="1718940" y="495634"/>
-                  </a:lnTo>
-                  <a:lnTo>
-                    <a:pt x="1790563" y="512556"/>
-                  </a:lnTo>
-                  <a:lnTo>
-                    <a:pt x="1862185" y="529218"/>
-                  </a:lnTo>
-                  <a:lnTo>
-                    <a:pt x="1933808" y="545625"/>
-                  </a:lnTo>
-                  <a:lnTo>
-                    <a:pt x="2005430" y="561779"/>
-                  </a:lnTo>
-                  <a:lnTo>
-                    <a:pt x="2077053" y="577685"/>
-                  </a:lnTo>
-                  <a:lnTo>
-                    <a:pt x="2148675" y="593348"/>
-                  </a:lnTo>
-                  <a:lnTo>
-                    <a:pt x="2220298" y="608769"/>
-                  </a:lnTo>
-                  <a:lnTo>
-                    <a:pt x="2291920" y="623954"/>
-                  </a:lnTo>
-                  <a:lnTo>
-                    <a:pt x="2363543" y="638906"/>
-                  </a:lnTo>
-                  <a:lnTo>
-                    <a:pt x="2435165" y="653628"/>
-                  </a:lnTo>
-                  <a:lnTo>
-                    <a:pt x="2506788" y="668124"/>
-                  </a:lnTo>
-                  <a:lnTo>
-                    <a:pt x="2578410" y="682397"/>
-                  </a:lnTo>
-                  <a:lnTo>
-                    <a:pt x="2650033" y="696451"/>
-                  </a:lnTo>
-                  <a:lnTo>
-                    <a:pt x="2721655" y="710290"/>
-                  </a:lnTo>
-                  <a:lnTo>
-                    <a:pt x="2793278" y="723916"/>
-                  </a:lnTo>
-                  <a:lnTo>
-                    <a:pt x="2864901" y="737332"/>
-                  </a:lnTo>
-                  <a:lnTo>
-                    <a:pt x="2936523" y="750543"/>
-                  </a:lnTo>
-                  <a:lnTo>
-                    <a:pt x="3008146" y="763551"/>
-                  </a:lnTo>
-                  <a:lnTo>
-                    <a:pt x="3079768" y="771883"/>
-                  </a:lnTo>
-                  <a:lnTo>
-                    <a:pt x="3151391" y="777630"/>
-                  </a:lnTo>
-                  <a:lnTo>
-                    <a:pt x="3223013" y="783337"/>
-                  </a:lnTo>
-                  <a:lnTo>
-                    <a:pt x="3294636" y="789004"/>
-                  </a:lnTo>
-                  <a:lnTo>
-                    <a:pt x="3366258" y="794632"/>
-                  </a:lnTo>
-                  <a:lnTo>
-                    <a:pt x="3437881" y="800221"/>
-                  </a:lnTo>
-                  <a:lnTo>
-                    <a:pt x="3509503" y="805770"/>
-                  </a:lnTo>
-                  <a:lnTo>
-                    <a:pt x="3581126" y="811281"/>
-                  </a:lnTo>
-                  <a:lnTo>
-                    <a:pt x="3652748" y="816754"/>
-                  </a:lnTo>
-                  <a:lnTo>
-                    <a:pt x="3724371" y="822189"/>
-                  </a:lnTo>
-                  <a:lnTo>
-                    <a:pt x="3795993" y="827585"/>
-                  </a:lnTo>
-                  <a:lnTo>
-                    <a:pt x="3867616" y="832945"/>
-                  </a:lnTo>
-                  <a:lnTo>
-                    <a:pt x="3939238" y="838266"/>
-                  </a:lnTo>
-                  <a:lnTo>
-                    <a:pt x="4010861" y="843551"/>
-                  </a:lnTo>
-                  <a:lnTo>
-                    <a:pt x="4082483" y="848799"/>
-                  </a:lnTo>
-                  <a:lnTo>
-                    <a:pt x="4154106" y="854011"/>
-                  </a:lnTo>
-                  <a:lnTo>
-                    <a:pt x="4225729" y="859186"/>
-                  </a:lnTo>
-                  <a:lnTo>
-                    <a:pt x="4297351" y="864326"/>
-                  </a:lnTo>
-                  <a:lnTo>
-                    <a:pt x="4368974" y="869429"/>
-                  </a:lnTo>
-                  <a:lnTo>
-                    <a:pt x="4440596" y="874497"/>
-                  </a:lnTo>
-                  <a:lnTo>
-                    <a:pt x="4512219" y="879530"/>
-                  </a:lnTo>
-                  <a:lnTo>
-                    <a:pt x="4583841" y="884528"/>
-                  </a:lnTo>
-                  <a:lnTo>
-                    <a:pt x="4655464" y="889491"/>
-                  </a:lnTo>
-                  <a:lnTo>
-                    <a:pt x="4727086" y="894419"/>
-                  </a:lnTo>
-                  <a:lnTo>
-                    <a:pt x="4798709" y="899313"/>
-                  </a:lnTo>
-                  <a:lnTo>
-                    <a:pt x="4870331" y="904173"/>
-                  </a:lnTo>
-                  <a:lnTo>
-                    <a:pt x="4941954" y="908999"/>
-                  </a:lnTo>
-                  <a:lnTo>
-                    <a:pt x="5013576" y="913792"/>
-                  </a:lnTo>
-                  <a:lnTo>
-                    <a:pt x="5085199" y="918551"/>
-                  </a:lnTo>
-                  <a:lnTo>
-                    <a:pt x="5156821" y="923277"/>
-                  </a:lnTo>
-                  <a:lnTo>
-                    <a:pt x="5228444" y="927971"/>
-                  </a:lnTo>
-                  <a:lnTo>
-                    <a:pt x="5300066" y="932631"/>
-                  </a:lnTo>
-                  <a:lnTo>
-                    <a:pt x="5371689" y="937259"/>
-                  </a:lnTo>
-                  <a:lnTo>
-                    <a:pt x="5443311" y="941855"/>
-                  </a:lnTo>
-                  <a:lnTo>
-                    <a:pt x="5514934" y="946419"/>
-                  </a:lnTo>
-                  <a:lnTo>
-                    <a:pt x="5586557" y="950952"/>
-                  </a:lnTo>
-                  <a:lnTo>
-                    <a:pt x="5658179" y="955452"/>
-                  </a:lnTo>
-                  <a:lnTo>
-                    <a:pt x="5729802" y="959922"/>
-                  </a:lnTo>
-                  <a:lnTo>
-                    <a:pt x="5801424" y="964360"/>
-                  </a:lnTo>
-                  <a:lnTo>
-                    <a:pt x="5873047" y="968767"/>
-                  </a:lnTo>
-                  <a:lnTo>
-                    <a:pt x="5944669" y="973144"/>
-                  </a:lnTo>
-                  <a:lnTo>
-                    <a:pt x="6016292" y="977490"/>
-                  </a:lnTo>
-                  <a:lnTo>
-                    <a:pt x="6087914" y="981806"/>
-                  </a:lnTo>
-                  <a:lnTo>
-                    <a:pt x="6159537" y="986092"/>
-                  </a:lnTo>
-                  <a:lnTo>
-                    <a:pt x="6231159" y="990348"/>
-                  </a:lnTo>
-                  <a:lnTo>
-                    <a:pt x="6302782" y="994575"/>
-                  </a:lnTo>
-                  <a:lnTo>
-                    <a:pt x="6374404" y="998772"/>
-                  </a:lnTo>
-                  <a:lnTo>
-                    <a:pt x="6446027" y="1002939"/>
-                  </a:lnTo>
-                  <a:lnTo>
-                    <a:pt x="6517649" y="1007078"/>
-                  </a:lnTo>
-                  <a:lnTo>
-                    <a:pt x="6589272" y="1011188"/>
-                  </a:lnTo>
-                  <a:lnTo>
-                    <a:pt x="6660894" y="1015270"/>
-                  </a:lnTo>
-                  <a:lnTo>
-                    <a:pt x="6732517" y="1019323"/>
-                  </a:lnTo>
-                  <a:lnTo>
-                    <a:pt x="6804139" y="1023348"/>
-                  </a:lnTo>
-                  <a:lnTo>
-                    <a:pt x="6875762" y="1027345"/>
-                  </a:lnTo>
-                  <a:lnTo>
-                    <a:pt x="6947385" y="1031314"/>
-                  </a:lnTo>
-                  <a:lnTo>
-                    <a:pt x="7019007" y="1035255"/>
-                  </a:lnTo>
-                  <a:lnTo>
-                    <a:pt x="7090630" y="1039169"/>
-                  </a:lnTo>
-                  <a:lnTo>
-                    <a:pt x="7090630" y="1252390"/>
-                  </a:lnTo>
-                  <a:lnTo>
-                    <a:pt x="7019007" y="1247006"/>
-                  </a:lnTo>
-                  <a:lnTo>
-                    <a:pt x="6947385" y="1241538"/>
-                  </a:lnTo>
-                  <a:lnTo>
-                    <a:pt x="6875762" y="1235984"/>
-                  </a:lnTo>
-                  <a:lnTo>
-                    <a:pt x="6804139" y="1230344"/>
-                  </a:lnTo>
-                  <a:lnTo>
-                    <a:pt x="6732517" y="1224616"/>
-                  </a:lnTo>
-                  <a:lnTo>
-                    <a:pt x="6660894" y="1218798"/>
-                  </a:lnTo>
-                  <a:lnTo>
-                    <a:pt x="6589272" y="1212890"/>
-                  </a:lnTo>
-                  <a:lnTo>
-                    <a:pt x="6517649" y="1206890"/>
-                  </a:lnTo>
-                  <a:lnTo>
-                    <a:pt x="6446027" y="1200796"/>
-                  </a:lnTo>
-                  <a:lnTo>
-                    <a:pt x="6374404" y="1194607"/>
-                  </a:lnTo>
-                  <a:lnTo>
-                    <a:pt x="6302782" y="1188321"/>
-                  </a:lnTo>
-                  <a:lnTo>
-                    <a:pt x="6231159" y="1181938"/>
-                  </a:lnTo>
-                  <a:lnTo>
-                    <a:pt x="6159537" y="1175455"/>
-                  </a:lnTo>
-                  <a:lnTo>
-                    <a:pt x="6087914" y="1168871"/>
-                  </a:lnTo>
-                  <a:lnTo>
-                    <a:pt x="6016292" y="1162184"/>
-                  </a:lnTo>
-                  <a:lnTo>
-                    <a:pt x="5944669" y="1155393"/>
-                  </a:lnTo>
-                  <a:lnTo>
-                    <a:pt x="5873047" y="1148496"/>
-                  </a:lnTo>
-                  <a:lnTo>
-                    <a:pt x="5801424" y="1141491"/>
-                  </a:lnTo>
-                  <a:lnTo>
-                    <a:pt x="5729802" y="1134378"/>
-                  </a:lnTo>
-                  <a:lnTo>
-                    <a:pt x="5658179" y="1127153"/>
-                  </a:lnTo>
-                  <a:lnTo>
-                    <a:pt x="5586557" y="1119816"/>
-                  </a:lnTo>
-                  <a:lnTo>
-                    <a:pt x="5514934" y="1112364"/>
-                  </a:lnTo>
-                  <a:lnTo>
-                    <a:pt x="5443311" y="1104796"/>
-                  </a:lnTo>
-                  <a:lnTo>
-                    <a:pt x="5371689" y="1097110"/>
-                  </a:lnTo>
-                  <a:lnTo>
-                    <a:pt x="5300066" y="1089304"/>
-                  </a:lnTo>
-                  <a:lnTo>
-                    <a:pt x="5228444" y="1081376"/>
-                  </a:lnTo>
-                  <a:lnTo>
-                    <a:pt x="5156821" y="1073325"/>
-                  </a:lnTo>
-                  <a:lnTo>
-                    <a:pt x="5085199" y="1065148"/>
-                  </a:lnTo>
-                  <a:lnTo>
-                    <a:pt x="5013576" y="1056843"/>
-                  </a:lnTo>
-                  <a:lnTo>
-                    <a:pt x="4941954" y="1048410"/>
-                  </a:lnTo>
-                  <a:lnTo>
-                    <a:pt x="4870331" y="1039844"/>
-                  </a:lnTo>
-                  <a:lnTo>
-                    <a:pt x="4798709" y="1031145"/>
-                  </a:lnTo>
-                  <a:lnTo>
-                    <a:pt x="4727086" y="1022311"/>
-                  </a:lnTo>
-                  <a:lnTo>
-                    <a:pt x="4655464" y="1013338"/>
-                  </a:lnTo>
-                  <a:lnTo>
-                    <a:pt x="4583841" y="1004226"/>
-                  </a:lnTo>
-                  <a:lnTo>
-                    <a:pt x="4512219" y="994971"/>
-                  </a:lnTo>
-                  <a:lnTo>
-                    <a:pt x="4440596" y="985573"/>
-                  </a:lnTo>
-                  <a:lnTo>
-                    <a:pt x="4368974" y="976027"/>
-                  </a:lnTo>
-                  <a:lnTo>
-                    <a:pt x="4297351" y="966333"/>
-                  </a:lnTo>
-                  <a:lnTo>
-                    <a:pt x="4225729" y="956488"/>
-                  </a:lnTo>
-                  <a:lnTo>
-                    <a:pt x="4154106" y="946489"/>
-                  </a:lnTo>
-                  <a:lnTo>
-                    <a:pt x="4082483" y="936334"/>
-                  </a:lnTo>
-                  <a:lnTo>
-                    <a:pt x="4010861" y="926020"/>
-                  </a:lnTo>
-                  <a:lnTo>
-                    <a:pt x="3939238" y="915546"/>
-                  </a:lnTo>
-                  <a:lnTo>
-                    <a:pt x="3867616" y="904909"/>
-                  </a:lnTo>
-                  <a:lnTo>
-                    <a:pt x="3795993" y="894106"/>
-                  </a:lnTo>
-                  <a:lnTo>
-                    <a:pt x="3724371" y="883134"/>
-                  </a:lnTo>
-                  <a:lnTo>
-                    <a:pt x="3652748" y="871991"/>
-                  </a:lnTo>
-                  <a:lnTo>
-                    <a:pt x="3581126" y="860674"/>
-                  </a:lnTo>
-                  <a:lnTo>
-                    <a:pt x="3509503" y="849181"/>
-                  </a:lnTo>
-                  <a:lnTo>
-                    <a:pt x="3437881" y="837509"/>
-                  </a:lnTo>
-                  <a:lnTo>
-                    <a:pt x="3366258" y="825654"/>
-                  </a:lnTo>
-                  <a:lnTo>
-                    <a:pt x="3294636" y="813615"/>
-                  </a:lnTo>
-                  <a:lnTo>
-                    <a:pt x="3223013" y="801388"/>
-                  </a:lnTo>
-                  <a:lnTo>
-                    <a:pt x="3151391" y="788970"/>
-                  </a:lnTo>
-                  <a:lnTo>
-                    <a:pt x="3079768" y="776359"/>
-                  </a:lnTo>
-                  <a:lnTo>
-                    <a:pt x="3008146" y="766096"/>
-                  </a:lnTo>
-                  <a:lnTo>
-                    <a:pt x="2936523" y="760268"/>
-                  </a:lnTo>
-                  <a:lnTo>
-                    <a:pt x="2864901" y="754400"/>
-                  </a:lnTo>
-                  <a:lnTo>
-                    <a:pt x="2793278" y="748490"/>
-                  </a:lnTo>
-                  <a:lnTo>
-                    <a:pt x="2721655" y="742539"/>
-                  </a:lnTo>
-                  <a:lnTo>
-                    <a:pt x="2650033" y="736546"/>
-                  </a:lnTo>
-                  <a:lnTo>
-                    <a:pt x="2578410" y="730511"/>
-                  </a:lnTo>
-                  <a:lnTo>
-                    <a:pt x="2506788" y="724434"/>
-                  </a:lnTo>
-                  <a:lnTo>
-                    <a:pt x="2435165" y="718315"/>
-                  </a:lnTo>
-                  <a:lnTo>
-                    <a:pt x="2363543" y="712152"/>
-                  </a:lnTo>
-                  <a:lnTo>
-                    <a:pt x="2291920" y="705946"/>
-                  </a:lnTo>
-                  <a:lnTo>
-                    <a:pt x="2220298" y="699697"/>
-                  </a:lnTo>
-                  <a:lnTo>
-                    <a:pt x="2148675" y="693404"/>
-                  </a:lnTo>
-                  <a:lnTo>
-                    <a:pt x="2077053" y="687067"/>
-                  </a:lnTo>
-                  <a:lnTo>
-                    <a:pt x="2005430" y="680685"/>
-                  </a:lnTo>
-                  <a:lnTo>
-                    <a:pt x="1933808" y="674259"/>
-                  </a:lnTo>
-                  <a:lnTo>
-                    <a:pt x="1862185" y="667788"/>
-                  </a:lnTo>
-                  <a:lnTo>
-                    <a:pt x="1790563" y="661271"/>
-                  </a:lnTo>
-                  <a:lnTo>
-                    <a:pt x="1718940" y="654709"/>
-                  </a:lnTo>
-                  <a:lnTo>
-                    <a:pt x="1647318" y="648100"/>
-                  </a:lnTo>
-                  <a:lnTo>
-                    <a:pt x="1575695" y="641446"/>
-                  </a:lnTo>
-                  <a:lnTo>
-                    <a:pt x="1504073" y="634744"/>
-                  </a:lnTo>
-                  <a:lnTo>
-                    <a:pt x="1432450" y="627996"/>
-                  </a:lnTo>
-                  <a:lnTo>
-                    <a:pt x="1360827" y="621200"/>
-                  </a:lnTo>
-                  <a:lnTo>
-                    <a:pt x="1289205" y="614357"/>
-                  </a:lnTo>
-                  <a:lnTo>
-                    <a:pt x="1217582" y="607466"/>
-                  </a:lnTo>
-                  <a:lnTo>
-                    <a:pt x="1145960" y="600527"/>
-                  </a:lnTo>
-                  <a:lnTo>
-                    <a:pt x="1074337" y="593539"/>
-                  </a:lnTo>
-                  <a:lnTo>
-                    <a:pt x="1002715" y="586502"/>
-                  </a:lnTo>
-                  <a:lnTo>
-                    <a:pt x="931092" y="579415"/>
-                  </a:lnTo>
-                  <a:lnTo>
-                    <a:pt x="859470" y="572279"/>
-                  </a:lnTo>
-                  <a:lnTo>
-                    <a:pt x="787847" y="565093"/>
-                  </a:lnTo>
-                  <a:lnTo>
-                    <a:pt x="716225" y="557857"/>
-                  </a:lnTo>
-                  <a:lnTo>
-                    <a:pt x="644602" y="550570"/>
-                  </a:lnTo>
-                  <a:lnTo>
-                    <a:pt x="572980" y="543231"/>
-                  </a:lnTo>
-                  <a:lnTo>
-                    <a:pt x="501357" y="535842"/>
-                  </a:lnTo>
-                  <a:lnTo>
-                    <a:pt x="429735" y="528400"/>
-                  </a:lnTo>
-                  <a:lnTo>
-                    <a:pt x="358112" y="520907"/>
-                  </a:lnTo>
-                  <a:lnTo>
-                    <a:pt x="286490" y="513361"/>
-                  </a:lnTo>
-                  <a:lnTo>
-                    <a:pt x="214867" y="505762"/>
-                  </a:lnTo>
-                  <a:lnTo>
-                    <a:pt x="143245" y="498110"/>
-                  </a:lnTo>
-                  <a:lnTo>
-                    <a:pt x="71622" y="490404"/>
-                  </a:lnTo>
-                  <a:lnTo>
-                    <a:pt x="0" y="482644"/>
+                    <a:pt x="71622" y="24384"/>
+                  </a:lnTo>
+                  <a:lnTo>
+                    <a:pt x="143245" y="48395"/>
+                  </a:lnTo>
+                  <a:lnTo>
+                    <a:pt x="214867" y="72039"/>
+                  </a:lnTo>
+                  <a:lnTo>
+                    <a:pt x="286490" y="95322"/>
+                  </a:lnTo>
+                  <a:lnTo>
+                    <a:pt x="358112" y="118248"/>
+                  </a:lnTo>
+                  <a:lnTo>
+                    <a:pt x="429735" y="140823"/>
+                  </a:lnTo>
+                  <a:lnTo>
+                    <a:pt x="501357" y="163053"/>
+                  </a:lnTo>
+                  <a:lnTo>
+                    <a:pt x="572980" y="184943"/>
+                  </a:lnTo>
+                  <a:lnTo>
+                    <a:pt x="644602" y="206498"/>
+                  </a:lnTo>
+                  <a:lnTo>
+                    <a:pt x="716225" y="227723"/>
+                  </a:lnTo>
+                  <a:lnTo>
+                    <a:pt x="787847" y="248623"/>
+                  </a:lnTo>
+                  <a:lnTo>
+                    <a:pt x="859470" y="269204"/>
+                  </a:lnTo>
+                  <a:lnTo>
+                    <a:pt x="931092" y="289469"/>
+                  </a:lnTo>
+                  <a:lnTo>
+                    <a:pt x="1002715" y="309425"/>
+                  </a:lnTo>
+                  <a:lnTo>
+                    <a:pt x="1074337" y="329075"/>
+                  </a:lnTo>
+                  <a:lnTo>
+                    <a:pt x="1145960" y="348425"/>
+                  </a:lnTo>
+                  <a:lnTo>
+                    <a:pt x="1217582" y="367479"/>
+                  </a:lnTo>
+                  <a:lnTo>
+                    <a:pt x="1289205" y="386241"/>
+                  </a:lnTo>
+                  <a:lnTo>
+                    <a:pt x="1360827" y="404716"/>
+                  </a:lnTo>
+                  <a:lnTo>
+                    <a:pt x="1432450" y="422909"/>
+                  </a:lnTo>
+                  <a:lnTo>
+                    <a:pt x="1504073" y="440823"/>
+                  </a:lnTo>
+                  <a:lnTo>
+                    <a:pt x="1575695" y="458463"/>
+                  </a:lnTo>
+                  <a:lnTo>
+                    <a:pt x="1647318" y="475833"/>
+                  </a:lnTo>
+                  <a:lnTo>
+                    <a:pt x="1718940" y="492937"/>
+                  </a:lnTo>
+                  <a:lnTo>
+                    <a:pt x="1790563" y="509780"/>
+                  </a:lnTo>
+                  <a:lnTo>
+                    <a:pt x="1862185" y="526365"/>
+                  </a:lnTo>
+                  <a:lnTo>
+                    <a:pt x="1933808" y="542696"/>
+                  </a:lnTo>
+                  <a:lnTo>
+                    <a:pt x="2005430" y="558778"/>
+                  </a:lnTo>
+                  <a:lnTo>
+                    <a:pt x="2077053" y="574613"/>
+                  </a:lnTo>
+                  <a:lnTo>
+                    <a:pt x="2148675" y="590206"/>
+                  </a:lnTo>
+                  <a:lnTo>
+                    <a:pt x="2220298" y="605561"/>
+                  </a:lnTo>
+                  <a:lnTo>
+                    <a:pt x="2291920" y="620680"/>
+                  </a:lnTo>
+                  <a:lnTo>
+                    <a:pt x="2363543" y="635569"/>
+                  </a:lnTo>
+                  <a:lnTo>
+                    <a:pt x="2435165" y="650229"/>
+                  </a:lnTo>
+                  <a:lnTo>
+                    <a:pt x="2506788" y="664665"/>
+                  </a:lnTo>
+                  <a:lnTo>
+                    <a:pt x="2578410" y="678881"/>
+                  </a:lnTo>
+                  <a:lnTo>
+                    <a:pt x="2650033" y="692879"/>
+                  </a:lnTo>
+                  <a:lnTo>
+                    <a:pt x="2721655" y="706662"/>
+                  </a:lnTo>
+                  <a:lnTo>
+                    <a:pt x="2793278" y="720235"/>
+                  </a:lnTo>
+                  <a:lnTo>
+                    <a:pt x="2864901" y="733600"/>
+                  </a:lnTo>
+                  <a:lnTo>
+                    <a:pt x="2936523" y="746761"/>
+                  </a:lnTo>
+                  <a:lnTo>
+                    <a:pt x="3008146" y="759720"/>
+                  </a:lnTo>
+                  <a:lnTo>
+                    <a:pt x="3079768" y="768016"/>
+                  </a:lnTo>
+                  <a:lnTo>
+                    <a:pt x="3151391" y="773734"/>
+                  </a:lnTo>
+                  <a:lnTo>
+                    <a:pt x="3223013" y="779412"/>
+                  </a:lnTo>
+                  <a:lnTo>
+                    <a:pt x="3294636" y="785050"/>
+                  </a:lnTo>
+                  <a:lnTo>
+                    <a:pt x="3366258" y="790649"/>
+                  </a:lnTo>
+                  <a:lnTo>
+                    <a:pt x="3437881" y="796210"/>
+                  </a:lnTo>
+                  <a:lnTo>
+                    <a:pt x="3509503" y="801732"/>
+                  </a:lnTo>
+                  <a:lnTo>
+                    <a:pt x="3581126" y="807216"/>
+                  </a:lnTo>
+                  <a:lnTo>
+                    <a:pt x="3652748" y="812662"/>
+                  </a:lnTo>
+                  <a:lnTo>
+                    <a:pt x="3724371" y="818070"/>
+                  </a:lnTo>
+                  <a:lnTo>
+                    <a:pt x="3795993" y="823441"/>
+                  </a:lnTo>
+                  <a:lnTo>
+                    <a:pt x="3867616" y="828775"/>
+                  </a:lnTo>
+                  <a:lnTo>
+                    <a:pt x="3939238" y="834071"/>
+                  </a:lnTo>
+                  <a:lnTo>
+                    <a:pt x="4010861" y="839331"/>
+                  </a:lnTo>
+                  <a:lnTo>
+                    <a:pt x="4082483" y="844555"/>
+                  </a:lnTo>
+                  <a:lnTo>
+                    <a:pt x="4154106" y="849742"/>
+                  </a:lnTo>
+                  <a:lnTo>
+                    <a:pt x="4225729" y="854894"/>
+                  </a:lnTo>
+                  <a:lnTo>
+                    <a:pt x="4297351" y="860010"/>
+                  </a:lnTo>
+                  <a:lnTo>
+                    <a:pt x="4368974" y="865090"/>
+                  </a:lnTo>
+                  <a:lnTo>
+                    <a:pt x="4440596" y="870135"/>
+                  </a:lnTo>
+                  <a:lnTo>
+                    <a:pt x="4512219" y="875146"/>
+                  </a:lnTo>
+                  <a:lnTo>
+                    <a:pt x="4583841" y="880121"/>
+                  </a:lnTo>
+                  <a:lnTo>
+                    <a:pt x="4655464" y="885062"/>
+                  </a:lnTo>
+                  <a:lnTo>
+                    <a:pt x="4727086" y="889969"/>
+                  </a:lnTo>
+                  <a:lnTo>
+                    <a:pt x="4798709" y="894842"/>
+                  </a:lnTo>
+                  <a:lnTo>
+                    <a:pt x="4870331" y="899681"/>
+                  </a:lnTo>
+                  <a:lnTo>
+                    <a:pt x="4941954" y="904487"/>
+                  </a:lnTo>
+                  <a:lnTo>
+                    <a:pt x="5013576" y="909260"/>
+                  </a:lnTo>
+                  <a:lnTo>
+                    <a:pt x="5085199" y="913999"/>
+                  </a:lnTo>
+                  <a:lnTo>
+                    <a:pt x="5156821" y="918706"/>
+                  </a:lnTo>
+                  <a:lnTo>
+                    <a:pt x="5228444" y="923380"/>
+                  </a:lnTo>
+                  <a:lnTo>
+                    <a:pt x="5300066" y="928021"/>
+                  </a:lnTo>
+                  <a:lnTo>
+                    <a:pt x="5371689" y="932631"/>
+                  </a:lnTo>
+                  <a:lnTo>
+                    <a:pt x="5443311" y="937209"/>
+                  </a:lnTo>
+                  <a:lnTo>
+                    <a:pt x="5514934" y="941755"/>
+                  </a:lnTo>
+                  <a:lnTo>
+                    <a:pt x="5586557" y="946269"/>
+                  </a:lnTo>
+                  <a:lnTo>
+                    <a:pt x="5658179" y="950752"/>
+                  </a:lnTo>
+                  <a:lnTo>
+                    <a:pt x="5729802" y="955204"/>
+                  </a:lnTo>
+                  <a:lnTo>
+                    <a:pt x="5801424" y="959626"/>
+                  </a:lnTo>
+                  <a:lnTo>
+                    <a:pt x="5873047" y="964016"/>
+                  </a:lnTo>
+                  <a:lnTo>
+                    <a:pt x="5944669" y="968377"/>
+                  </a:lnTo>
+                  <a:lnTo>
+                    <a:pt x="6016292" y="972707"/>
+                  </a:lnTo>
+                  <a:lnTo>
+                    <a:pt x="6087914" y="977007"/>
+                  </a:lnTo>
+                  <a:lnTo>
+                    <a:pt x="6159537" y="981277"/>
+                  </a:lnTo>
+                  <a:lnTo>
+                    <a:pt x="6231159" y="985518"/>
+                  </a:lnTo>
+                  <a:lnTo>
+                    <a:pt x="6302782" y="989730"/>
+                  </a:lnTo>
+                  <a:lnTo>
+                    <a:pt x="6374404" y="993912"/>
+                  </a:lnTo>
+                  <a:lnTo>
+                    <a:pt x="6446027" y="998065"/>
+                  </a:lnTo>
+                  <a:lnTo>
+                    <a:pt x="6517649" y="1002190"/>
+                  </a:lnTo>
+                  <a:lnTo>
+                    <a:pt x="6589272" y="1006286"/>
+                  </a:lnTo>
+                  <a:lnTo>
+                    <a:pt x="6660894" y="1010353"/>
+                  </a:lnTo>
+                  <a:lnTo>
+                    <a:pt x="6732517" y="1014393"/>
+                  </a:lnTo>
+                  <a:lnTo>
+                    <a:pt x="6804139" y="1018405"/>
+                  </a:lnTo>
+                  <a:lnTo>
+                    <a:pt x="6875762" y="1022388"/>
+                  </a:lnTo>
+                  <a:lnTo>
+                    <a:pt x="6947385" y="1026344"/>
+                  </a:lnTo>
+                  <a:lnTo>
+                    <a:pt x="7019007" y="1030273"/>
+                  </a:lnTo>
+                  <a:lnTo>
+                    <a:pt x="7090630" y="1034175"/>
+                  </a:lnTo>
+                  <a:lnTo>
+                    <a:pt x="7090630" y="1247428"/>
+                  </a:lnTo>
+                  <a:lnTo>
+                    <a:pt x="7019007" y="1242046"/>
+                  </a:lnTo>
+                  <a:lnTo>
+                    <a:pt x="6947385" y="1236581"/>
+                  </a:lnTo>
+                  <a:lnTo>
+                    <a:pt x="6875762" y="1231030"/>
+                  </a:lnTo>
+                  <a:lnTo>
+                    <a:pt x="6804139" y="1225394"/>
+                  </a:lnTo>
+                  <a:lnTo>
+                    <a:pt x="6732517" y="1219670"/>
+                  </a:lnTo>
+                  <a:lnTo>
+                    <a:pt x="6660894" y="1213857"/>
+                  </a:lnTo>
+                  <a:lnTo>
+                    <a:pt x="6589272" y="1207954"/>
+                  </a:lnTo>
+                  <a:lnTo>
+                    <a:pt x="6517649" y="1201959"/>
+                  </a:lnTo>
+                  <a:lnTo>
+                    <a:pt x="6446027" y="1195871"/>
+                  </a:lnTo>
+                  <a:lnTo>
+                    <a:pt x="6374404" y="1189688"/>
+                  </a:lnTo>
+                  <a:lnTo>
+                    <a:pt x="6302782" y="1183409"/>
+                  </a:lnTo>
+                  <a:lnTo>
+                    <a:pt x="6231159" y="1177033"/>
+                  </a:lnTo>
+                  <a:lnTo>
+                    <a:pt x="6159537" y="1170557"/>
+                  </a:lnTo>
+                  <a:lnTo>
+                    <a:pt x="6087914" y="1163981"/>
+                  </a:lnTo>
+                  <a:lnTo>
+                    <a:pt x="6016292" y="1157303"/>
+                  </a:lnTo>
+                  <a:lnTo>
+                    <a:pt x="5944669" y="1150521"/>
+                  </a:lnTo>
+                  <a:lnTo>
+                    <a:pt x="5873047" y="1143634"/>
+                  </a:lnTo>
+                  <a:lnTo>
+                    <a:pt x="5801424" y="1136639"/>
+                  </a:lnTo>
+                  <a:lnTo>
+                    <a:pt x="5729802" y="1129536"/>
+                  </a:lnTo>
+                  <a:lnTo>
+                    <a:pt x="5658179" y="1122323"/>
+                  </a:lnTo>
+                  <a:lnTo>
+                    <a:pt x="5586557" y="1114997"/>
+                  </a:lnTo>
+                  <a:lnTo>
+                    <a:pt x="5514934" y="1107558"/>
+                  </a:lnTo>
+                  <a:lnTo>
+                    <a:pt x="5443311" y="1100003"/>
+                  </a:lnTo>
+                  <a:lnTo>
+                    <a:pt x="5371689" y="1092331"/>
+                  </a:lnTo>
+                  <a:lnTo>
+                    <a:pt x="5300066" y="1084540"/>
+                  </a:lnTo>
+                  <a:lnTo>
+                    <a:pt x="5228444" y="1076627"/>
+                  </a:lnTo>
+                  <a:lnTo>
+                    <a:pt x="5156821" y="1068592"/>
+                  </a:lnTo>
+                  <a:lnTo>
+                    <a:pt x="5085199" y="1060431"/>
+                  </a:lnTo>
+                  <a:lnTo>
+                    <a:pt x="5013576" y="1052144"/>
+                  </a:lnTo>
+                  <a:lnTo>
+                    <a:pt x="4941954" y="1043728"/>
+                  </a:lnTo>
+                  <a:lnTo>
+                    <a:pt x="4870331" y="1035182"/>
+                  </a:lnTo>
+                  <a:lnTo>
+                    <a:pt x="4798709" y="1026502"/>
+                  </a:lnTo>
+                  <a:lnTo>
+                    <a:pt x="4727086" y="1017688"/>
+                  </a:lnTo>
+                  <a:lnTo>
+                    <a:pt x="4655464" y="1008737"/>
+                  </a:lnTo>
+                  <a:lnTo>
+                    <a:pt x="4583841" y="999647"/>
+                  </a:lnTo>
+                  <a:lnTo>
+                    <a:pt x="4512219" y="990415"/>
+                  </a:lnTo>
+                  <a:lnTo>
+                    <a:pt x="4440596" y="981040"/>
+                  </a:lnTo>
+                  <a:lnTo>
+                    <a:pt x="4368974" y="971520"/>
+                  </a:lnTo>
+                  <a:lnTo>
+                    <a:pt x="4297351" y="961851"/>
+                  </a:lnTo>
+                  <a:lnTo>
+                    <a:pt x="4225729" y="952032"/>
+                  </a:lnTo>
+                  <a:lnTo>
+                    <a:pt x="4154106" y="942061"/>
+                  </a:lnTo>
+                  <a:lnTo>
+                    <a:pt x="4082483" y="931935"/>
+                  </a:lnTo>
+                  <a:lnTo>
+                    <a:pt x="4010861" y="921651"/>
+                  </a:lnTo>
+                  <a:lnTo>
+                    <a:pt x="3939238" y="911208"/>
+                  </a:lnTo>
+                  <a:lnTo>
+                    <a:pt x="3867616" y="900602"/>
+                  </a:lnTo>
+                  <a:lnTo>
+                    <a:pt x="3795993" y="889832"/>
+                  </a:lnTo>
+                  <a:lnTo>
+                    <a:pt x="3724371" y="878894"/>
+                  </a:lnTo>
+                  <a:lnTo>
+                    <a:pt x="3652748" y="867786"/>
+                  </a:lnTo>
+                  <a:lnTo>
+                    <a:pt x="3581126" y="856506"/>
+                  </a:lnTo>
+                  <a:lnTo>
+                    <a:pt x="3509503" y="845051"/>
+                  </a:lnTo>
+                  <a:lnTo>
+                    <a:pt x="3437881" y="833417"/>
+                  </a:lnTo>
+                  <a:lnTo>
+                    <a:pt x="3366258" y="821603"/>
+                  </a:lnTo>
+                  <a:lnTo>
+                    <a:pt x="3294636" y="809605"/>
+                  </a:lnTo>
+                  <a:lnTo>
+                    <a:pt x="3223013" y="797421"/>
+                  </a:lnTo>
+                  <a:lnTo>
+                    <a:pt x="3151391" y="785047"/>
+                  </a:lnTo>
+                  <a:lnTo>
+                    <a:pt x="3079768" y="772481"/>
+                  </a:lnTo>
+                  <a:lnTo>
+                    <a:pt x="3008146" y="762259"/>
+                  </a:lnTo>
+                  <a:lnTo>
+                    <a:pt x="2936523" y="756462"/>
+                  </a:lnTo>
+                  <a:lnTo>
+                    <a:pt x="2864901" y="750624"/>
+                  </a:lnTo>
+                  <a:lnTo>
+                    <a:pt x="2793278" y="744746"/>
+                  </a:lnTo>
+                  <a:lnTo>
+                    <a:pt x="2721655" y="738826"/>
+                  </a:lnTo>
+                  <a:lnTo>
+                    <a:pt x="2650033" y="732866"/>
+                  </a:lnTo>
+                  <a:lnTo>
+                    <a:pt x="2578410" y="726863"/>
+                  </a:lnTo>
+                  <a:lnTo>
+                    <a:pt x="2506788" y="720819"/>
+                  </a:lnTo>
+                  <a:lnTo>
+                    <a:pt x="2435165" y="714733"/>
+                  </a:lnTo>
+                  <a:lnTo>
+                    <a:pt x="2363543" y="708604"/>
+                  </a:lnTo>
+                  <a:lnTo>
+                    <a:pt x="2291920" y="702433"/>
+                  </a:lnTo>
+                  <a:lnTo>
+                    <a:pt x="2220298" y="696219"/>
+                  </a:lnTo>
+                  <a:lnTo>
+                    <a:pt x="2148675" y="689961"/>
+                  </a:lnTo>
+                  <a:lnTo>
+                    <a:pt x="2077053" y="683659"/>
+                  </a:lnTo>
+                  <a:lnTo>
+                    <a:pt x="2005430" y="677314"/>
+                  </a:lnTo>
+                  <a:lnTo>
+                    <a:pt x="1933808" y="670925"/>
+                  </a:lnTo>
+                  <a:lnTo>
+                    <a:pt x="1862185" y="664490"/>
+                  </a:lnTo>
+                  <a:lnTo>
+                    <a:pt x="1790563" y="658012"/>
+                  </a:lnTo>
+                  <a:lnTo>
+                    <a:pt x="1718940" y="651487"/>
+                  </a:lnTo>
+                  <a:lnTo>
+                    <a:pt x="1647318" y="644918"/>
+                  </a:lnTo>
+                  <a:lnTo>
+                    <a:pt x="1575695" y="638302"/>
+                  </a:lnTo>
+                  <a:lnTo>
+                    <a:pt x="1504073" y="631641"/>
+                  </a:lnTo>
+                  <a:lnTo>
+                    <a:pt x="1432450" y="624933"/>
+                  </a:lnTo>
+                  <a:lnTo>
+                    <a:pt x="1360827" y="618178"/>
+                  </a:lnTo>
+                  <a:lnTo>
+                    <a:pt x="1289205" y="611376"/>
+                  </a:lnTo>
+                  <a:lnTo>
+                    <a:pt x="1217582" y="604527"/>
+                  </a:lnTo>
+                  <a:lnTo>
+                    <a:pt x="1145960" y="597630"/>
+                  </a:lnTo>
+                  <a:lnTo>
+                    <a:pt x="1074337" y="590685"/>
+                  </a:lnTo>
+                  <a:lnTo>
+                    <a:pt x="1002715" y="583691"/>
+                  </a:lnTo>
+                  <a:lnTo>
+                    <a:pt x="931092" y="576649"/>
+                  </a:lnTo>
+                  <a:lnTo>
+                    <a:pt x="859470" y="569558"/>
+                  </a:lnTo>
+                  <a:lnTo>
+                    <a:pt x="787847" y="562417"/>
+                  </a:lnTo>
+                  <a:lnTo>
+                    <a:pt x="716225" y="555226"/>
+                  </a:lnTo>
+                  <a:lnTo>
+                    <a:pt x="644602" y="547986"/>
+                  </a:lnTo>
+                  <a:lnTo>
+                    <a:pt x="572980" y="540695"/>
+                  </a:lnTo>
+                  <a:lnTo>
+                    <a:pt x="501357" y="533353"/>
+                  </a:lnTo>
+                  <a:lnTo>
+                    <a:pt x="429735" y="525959"/>
+                  </a:lnTo>
+                  <a:lnTo>
+                    <a:pt x="358112" y="518515"/>
+                  </a:lnTo>
+                  <a:lnTo>
+                    <a:pt x="286490" y="511018"/>
+                  </a:lnTo>
+                  <a:lnTo>
+                    <a:pt x="214867" y="503469"/>
+                  </a:lnTo>
+                  <a:lnTo>
+                    <a:pt x="143245" y="495867"/>
+                  </a:lnTo>
+                  <a:lnTo>
+                    <a:pt x="71622" y="488213"/>
+                  </a:lnTo>
+                  <a:lnTo>
+                    <a:pt x="0" y="480505"/>
                   </a:lnTo>
                   <a:close/>
                 </a:path>
@@ -3676,312 +3676,312 @@
           </p:nvSpPr>
           <p:spPr>
             <a:xfrm>
-              <a:off x="1172049" y="3959602"/>
-              <a:ext cx="7090630" cy="1039169"/>
+              <a:off x="1172049" y="3963449"/>
+              <a:ext cx="7090630" cy="1034175"/>
             </a:xfrm>
             <a:custGeom>
               <a:avLst/>
               <a:pathLst>
-                <a:path w="7090630" h="1039169">
+                <a:path w="7090630" h="1034175">
                   <a:moveTo>
                     <a:pt x="0" y="0"/>
                   </a:moveTo>
                   <a:lnTo>
-                    <a:pt x="71622" y="24532"/>
-                  </a:lnTo>
-                  <a:lnTo>
-                    <a:pt x="143245" y="48688"/>
-                  </a:lnTo>
-                  <a:lnTo>
-                    <a:pt x="214867" y="72474"/>
-                  </a:lnTo>
-                  <a:lnTo>
-                    <a:pt x="286490" y="95894"/>
-                  </a:lnTo>
-                  <a:lnTo>
-                    <a:pt x="358112" y="118954"/>
-                  </a:lnTo>
-                  <a:lnTo>
-                    <a:pt x="429735" y="141660"/>
-                  </a:lnTo>
-                  <a:lnTo>
-                    <a:pt x="501357" y="164018"/>
-                  </a:lnTo>
-                  <a:lnTo>
-                    <a:pt x="572980" y="186032"/>
-                  </a:lnTo>
-                  <a:lnTo>
-                    <a:pt x="644602" y="207708"/>
-                  </a:lnTo>
-                  <a:lnTo>
-                    <a:pt x="716225" y="229052"/>
-                  </a:lnTo>
-                  <a:lnTo>
-                    <a:pt x="787847" y="250067"/>
-                  </a:lnTo>
-                  <a:lnTo>
-                    <a:pt x="859470" y="270760"/>
-                  </a:lnTo>
-                  <a:lnTo>
-                    <a:pt x="931092" y="291135"/>
-                  </a:lnTo>
-                  <a:lnTo>
-                    <a:pt x="1002715" y="311198"/>
-                  </a:lnTo>
-                  <a:lnTo>
-                    <a:pt x="1074337" y="330952"/>
-                  </a:lnTo>
-                  <a:lnTo>
-                    <a:pt x="1145960" y="350403"/>
-                  </a:lnTo>
-                  <a:lnTo>
-                    <a:pt x="1217582" y="369555"/>
-                  </a:lnTo>
-                  <a:lnTo>
-                    <a:pt x="1289205" y="388413"/>
-                  </a:lnTo>
-                  <a:lnTo>
-                    <a:pt x="1360827" y="406982"/>
-                  </a:lnTo>
-                  <a:lnTo>
-                    <a:pt x="1432450" y="425265"/>
-                  </a:lnTo>
-                  <a:lnTo>
-                    <a:pt x="1504073" y="443268"/>
-                  </a:lnTo>
-                  <a:lnTo>
-                    <a:pt x="1575695" y="460994"/>
-                  </a:lnTo>
-                  <a:lnTo>
-                    <a:pt x="1647318" y="478448"/>
-                  </a:lnTo>
-                  <a:lnTo>
-                    <a:pt x="1718940" y="495634"/>
-                  </a:lnTo>
-                  <a:lnTo>
-                    <a:pt x="1790563" y="512556"/>
-                  </a:lnTo>
-                  <a:lnTo>
-                    <a:pt x="1862185" y="529218"/>
-                  </a:lnTo>
-                  <a:lnTo>
-                    <a:pt x="1933808" y="545625"/>
-                  </a:lnTo>
-                  <a:lnTo>
-                    <a:pt x="2005430" y="561779"/>
-                  </a:lnTo>
-                  <a:lnTo>
-                    <a:pt x="2077053" y="577685"/>
-                  </a:lnTo>
-                  <a:lnTo>
-                    <a:pt x="2148675" y="593348"/>
-                  </a:lnTo>
-                  <a:lnTo>
-                    <a:pt x="2220298" y="608769"/>
-                  </a:lnTo>
-                  <a:lnTo>
-                    <a:pt x="2291920" y="623954"/>
-                  </a:lnTo>
-                  <a:lnTo>
-                    <a:pt x="2363543" y="638906"/>
-                  </a:lnTo>
-                  <a:lnTo>
-                    <a:pt x="2435165" y="653628"/>
-                  </a:lnTo>
-                  <a:lnTo>
-                    <a:pt x="2506788" y="668124"/>
-                  </a:lnTo>
-                  <a:lnTo>
-                    <a:pt x="2578410" y="682397"/>
-                  </a:lnTo>
-                  <a:lnTo>
-                    <a:pt x="2650033" y="696451"/>
-                  </a:lnTo>
-                  <a:lnTo>
-                    <a:pt x="2721655" y="710290"/>
-                  </a:lnTo>
-                  <a:lnTo>
-                    <a:pt x="2793278" y="723916"/>
-                  </a:lnTo>
-                  <a:lnTo>
-                    <a:pt x="2864901" y="737332"/>
-                  </a:lnTo>
-                  <a:lnTo>
-                    <a:pt x="2936523" y="750543"/>
-                  </a:lnTo>
-                  <a:lnTo>
-                    <a:pt x="3008146" y="763551"/>
-                  </a:lnTo>
-                  <a:lnTo>
-                    <a:pt x="3079768" y="771883"/>
-                  </a:lnTo>
-                  <a:lnTo>
-                    <a:pt x="3151391" y="777630"/>
-                  </a:lnTo>
-                  <a:lnTo>
-                    <a:pt x="3223013" y="783337"/>
-                  </a:lnTo>
-                  <a:lnTo>
-                    <a:pt x="3294636" y="789004"/>
-                  </a:lnTo>
-                  <a:lnTo>
-                    <a:pt x="3366258" y="794632"/>
-                  </a:lnTo>
-                  <a:lnTo>
-                    <a:pt x="3437881" y="800221"/>
-                  </a:lnTo>
-                  <a:lnTo>
-                    <a:pt x="3509503" y="805770"/>
-                  </a:lnTo>
-                  <a:lnTo>
-                    <a:pt x="3581126" y="811281"/>
-                  </a:lnTo>
-                  <a:lnTo>
-                    <a:pt x="3652748" y="816754"/>
-                  </a:lnTo>
-                  <a:lnTo>
-                    <a:pt x="3724371" y="822189"/>
-                  </a:lnTo>
-                  <a:lnTo>
-                    <a:pt x="3795993" y="827585"/>
-                  </a:lnTo>
-                  <a:lnTo>
-                    <a:pt x="3867616" y="832945"/>
-                  </a:lnTo>
-                  <a:lnTo>
-                    <a:pt x="3939238" y="838266"/>
-                  </a:lnTo>
-                  <a:lnTo>
-                    <a:pt x="4010861" y="843551"/>
-                  </a:lnTo>
-                  <a:lnTo>
-                    <a:pt x="4082483" y="848799"/>
-                  </a:lnTo>
-                  <a:lnTo>
-                    <a:pt x="4154106" y="854011"/>
-                  </a:lnTo>
-                  <a:lnTo>
-                    <a:pt x="4225729" y="859186"/>
-                  </a:lnTo>
-                  <a:lnTo>
-                    <a:pt x="4297351" y="864326"/>
-                  </a:lnTo>
-                  <a:lnTo>
-                    <a:pt x="4368974" y="869429"/>
-                  </a:lnTo>
-                  <a:lnTo>
-                    <a:pt x="4440596" y="874497"/>
-                  </a:lnTo>
-                  <a:lnTo>
-                    <a:pt x="4512219" y="879530"/>
-                  </a:lnTo>
-                  <a:lnTo>
-                    <a:pt x="4583841" y="884528"/>
-                  </a:lnTo>
-                  <a:lnTo>
-                    <a:pt x="4655464" y="889491"/>
-                  </a:lnTo>
-                  <a:lnTo>
-                    <a:pt x="4727086" y="894419"/>
-                  </a:lnTo>
-                  <a:lnTo>
-                    <a:pt x="4798709" y="899313"/>
-                  </a:lnTo>
-                  <a:lnTo>
-                    <a:pt x="4870331" y="904173"/>
-                  </a:lnTo>
-                  <a:lnTo>
-                    <a:pt x="4941954" y="908999"/>
-                  </a:lnTo>
-                  <a:lnTo>
-                    <a:pt x="5013576" y="913792"/>
-                  </a:lnTo>
-                  <a:lnTo>
-                    <a:pt x="5085199" y="918551"/>
-                  </a:lnTo>
-                  <a:lnTo>
-                    <a:pt x="5156821" y="923277"/>
-                  </a:lnTo>
-                  <a:lnTo>
-                    <a:pt x="5228444" y="927971"/>
-                  </a:lnTo>
-                  <a:lnTo>
-                    <a:pt x="5300066" y="932631"/>
-                  </a:lnTo>
-                  <a:lnTo>
-                    <a:pt x="5371689" y="937259"/>
-                  </a:lnTo>
-                  <a:lnTo>
-                    <a:pt x="5443311" y="941855"/>
-                  </a:lnTo>
-                  <a:lnTo>
-                    <a:pt x="5514934" y="946419"/>
-                  </a:lnTo>
-                  <a:lnTo>
-                    <a:pt x="5586557" y="950952"/>
-                  </a:lnTo>
-                  <a:lnTo>
-                    <a:pt x="5658179" y="955452"/>
-                  </a:lnTo>
-                  <a:lnTo>
-                    <a:pt x="5729802" y="959922"/>
-                  </a:lnTo>
-                  <a:lnTo>
-                    <a:pt x="5801424" y="964360"/>
-                  </a:lnTo>
-                  <a:lnTo>
-                    <a:pt x="5873047" y="968767"/>
-                  </a:lnTo>
-                  <a:lnTo>
-                    <a:pt x="5944669" y="973144"/>
-                  </a:lnTo>
-                  <a:lnTo>
-                    <a:pt x="6016292" y="977490"/>
-                  </a:lnTo>
-                  <a:lnTo>
-                    <a:pt x="6087914" y="981806"/>
-                  </a:lnTo>
-                  <a:lnTo>
-                    <a:pt x="6159537" y="986092"/>
-                  </a:lnTo>
-                  <a:lnTo>
-                    <a:pt x="6231159" y="990348"/>
-                  </a:lnTo>
-                  <a:lnTo>
-                    <a:pt x="6302782" y="994575"/>
-                  </a:lnTo>
-                  <a:lnTo>
-                    <a:pt x="6374404" y="998772"/>
-                  </a:lnTo>
-                  <a:lnTo>
-                    <a:pt x="6446027" y="1002939"/>
-                  </a:lnTo>
-                  <a:lnTo>
-                    <a:pt x="6517649" y="1007078"/>
-                  </a:lnTo>
-                  <a:lnTo>
-                    <a:pt x="6589272" y="1011188"/>
-                  </a:lnTo>
-                  <a:lnTo>
-                    <a:pt x="6660894" y="1015270"/>
-                  </a:lnTo>
-                  <a:lnTo>
-                    <a:pt x="6732517" y="1019323"/>
-                  </a:lnTo>
-                  <a:lnTo>
-                    <a:pt x="6804139" y="1023348"/>
-                  </a:lnTo>
-                  <a:lnTo>
-                    <a:pt x="6875762" y="1027345"/>
-                  </a:lnTo>
-                  <a:lnTo>
-                    <a:pt x="6947385" y="1031314"/>
-                  </a:lnTo>
-                  <a:lnTo>
-                    <a:pt x="7019007" y="1035255"/>
-                  </a:lnTo>
-                  <a:lnTo>
-                    <a:pt x="7090630" y="1039169"/>
+                    <a:pt x="71622" y="24384"/>
+                  </a:lnTo>
+                  <a:lnTo>
+                    <a:pt x="143245" y="48395"/>
+                  </a:lnTo>
+                  <a:lnTo>
+                    <a:pt x="214867" y="72039"/>
+                  </a:lnTo>
+                  <a:lnTo>
+                    <a:pt x="286490" y="95322"/>
+                  </a:lnTo>
+                  <a:lnTo>
+                    <a:pt x="358112" y="118248"/>
+                  </a:lnTo>
+                  <a:lnTo>
+                    <a:pt x="429735" y="140823"/>
+                  </a:lnTo>
+                  <a:lnTo>
+                    <a:pt x="501357" y="163053"/>
+                  </a:lnTo>
+                  <a:lnTo>
+                    <a:pt x="572980" y="184943"/>
+                  </a:lnTo>
+                  <a:lnTo>
+                    <a:pt x="644602" y="206498"/>
+                  </a:lnTo>
+                  <a:lnTo>
+                    <a:pt x="716225" y="227723"/>
+                  </a:lnTo>
+                  <a:lnTo>
+                    <a:pt x="787847" y="248623"/>
+                  </a:lnTo>
+                  <a:lnTo>
+                    <a:pt x="859470" y="269204"/>
+                  </a:lnTo>
+                  <a:lnTo>
+                    <a:pt x="931092" y="289469"/>
+                  </a:lnTo>
+                  <a:lnTo>
+                    <a:pt x="1002715" y="309425"/>
+                  </a:lnTo>
+                  <a:lnTo>
+                    <a:pt x="1074337" y="329075"/>
+                  </a:lnTo>
+                  <a:lnTo>
+                    <a:pt x="1145960" y="348425"/>
+                  </a:lnTo>
+                  <a:lnTo>
+                    <a:pt x="1217582" y="367479"/>
+                  </a:lnTo>
+                  <a:lnTo>
+                    <a:pt x="1289205" y="386241"/>
+                  </a:lnTo>
+                  <a:lnTo>
+                    <a:pt x="1360827" y="404716"/>
+                  </a:lnTo>
+                  <a:lnTo>
+                    <a:pt x="1432450" y="422909"/>
+                  </a:lnTo>
+                  <a:lnTo>
+                    <a:pt x="1504073" y="440823"/>
+                  </a:lnTo>
+                  <a:lnTo>
+                    <a:pt x="1575695" y="458463"/>
+                  </a:lnTo>
+                  <a:lnTo>
+                    <a:pt x="1647318" y="475833"/>
+                  </a:lnTo>
+                  <a:lnTo>
+                    <a:pt x="1718940" y="492937"/>
+                  </a:lnTo>
+                  <a:lnTo>
+                    <a:pt x="1790563" y="509780"/>
+                  </a:lnTo>
+                  <a:lnTo>
+                    <a:pt x="1862185" y="526365"/>
+                  </a:lnTo>
+                  <a:lnTo>
+                    <a:pt x="1933808" y="542696"/>
+                  </a:lnTo>
+                  <a:lnTo>
+                    <a:pt x="2005430" y="558778"/>
+                  </a:lnTo>
+                  <a:lnTo>
+                    <a:pt x="2077053" y="574613"/>
+                  </a:lnTo>
+                  <a:lnTo>
+                    <a:pt x="2148675" y="590206"/>
+                  </a:lnTo>
+                  <a:lnTo>
+                    <a:pt x="2220298" y="605561"/>
+                  </a:lnTo>
+                  <a:lnTo>
+                    <a:pt x="2291920" y="620680"/>
+                  </a:lnTo>
+                  <a:lnTo>
+                    <a:pt x="2363543" y="635569"/>
+                  </a:lnTo>
+                  <a:lnTo>
+                    <a:pt x="2435165" y="650229"/>
+                  </a:lnTo>
+                  <a:lnTo>
+                    <a:pt x="2506788" y="664665"/>
+                  </a:lnTo>
+                  <a:lnTo>
+                    <a:pt x="2578410" y="678881"/>
+                  </a:lnTo>
+                  <a:lnTo>
+                    <a:pt x="2650033" y="692879"/>
+                  </a:lnTo>
+                  <a:lnTo>
+                    <a:pt x="2721655" y="706662"/>
+                  </a:lnTo>
+                  <a:lnTo>
+                    <a:pt x="2793278" y="720235"/>
+                  </a:lnTo>
+                  <a:lnTo>
+                    <a:pt x="2864901" y="733600"/>
+                  </a:lnTo>
+                  <a:lnTo>
+                    <a:pt x="2936523" y="746761"/>
+                  </a:lnTo>
+                  <a:lnTo>
+                    <a:pt x="3008146" y="759720"/>
+                  </a:lnTo>
+                  <a:lnTo>
+                    <a:pt x="3079768" y="768016"/>
+                  </a:lnTo>
+                  <a:lnTo>
+                    <a:pt x="3151391" y="773734"/>
+                  </a:lnTo>
+                  <a:lnTo>
+                    <a:pt x="3223013" y="779412"/>
+                  </a:lnTo>
+                  <a:lnTo>
+                    <a:pt x="3294636" y="785050"/>
+                  </a:lnTo>
+                  <a:lnTo>
+                    <a:pt x="3366258" y="790649"/>
+                  </a:lnTo>
+                  <a:lnTo>
+                    <a:pt x="3437881" y="796210"/>
+                  </a:lnTo>
+                  <a:lnTo>
+                    <a:pt x="3509503" y="801732"/>
+                  </a:lnTo>
+                  <a:lnTo>
+                    <a:pt x="3581126" y="807216"/>
+                  </a:lnTo>
+                  <a:lnTo>
+                    <a:pt x="3652748" y="812662"/>
+                  </a:lnTo>
+                  <a:lnTo>
+                    <a:pt x="3724371" y="818070"/>
+                  </a:lnTo>
+                  <a:lnTo>
+                    <a:pt x="3795993" y="823441"/>
+                  </a:lnTo>
+                  <a:lnTo>
+                    <a:pt x="3867616" y="828775"/>
+                  </a:lnTo>
+                  <a:lnTo>
+                    <a:pt x="3939238" y="834071"/>
+                  </a:lnTo>
+                  <a:lnTo>
+                    <a:pt x="4010861" y="839331"/>
+                  </a:lnTo>
+                  <a:lnTo>
+                    <a:pt x="4082483" y="844555"/>
+                  </a:lnTo>
+                  <a:lnTo>
+                    <a:pt x="4154106" y="849742"/>
+                  </a:lnTo>
+                  <a:lnTo>
+                    <a:pt x="4225729" y="854894"/>
+                  </a:lnTo>
+                  <a:lnTo>
+                    <a:pt x="4297351" y="860010"/>
+                  </a:lnTo>
+                  <a:lnTo>
+                    <a:pt x="4368974" y="865090"/>
+                  </a:lnTo>
+                  <a:lnTo>
+                    <a:pt x="4440596" y="870135"/>
+                  </a:lnTo>
+                  <a:lnTo>
+                    <a:pt x="4512219" y="875146"/>
+                  </a:lnTo>
+                  <a:lnTo>
+                    <a:pt x="4583841" y="880121"/>
+                  </a:lnTo>
+                  <a:lnTo>
+                    <a:pt x="4655464" y="885062"/>
+                  </a:lnTo>
+                  <a:lnTo>
+                    <a:pt x="4727086" y="889969"/>
+                  </a:lnTo>
+                  <a:lnTo>
+                    <a:pt x="4798709" y="894842"/>
+                  </a:lnTo>
+                  <a:lnTo>
+                    <a:pt x="4870331" y="899681"/>
+                  </a:lnTo>
+                  <a:lnTo>
+                    <a:pt x="4941954" y="904487"/>
+                  </a:lnTo>
+                  <a:lnTo>
+                    <a:pt x="5013576" y="909260"/>
+                  </a:lnTo>
+                  <a:lnTo>
+                    <a:pt x="5085199" y="913999"/>
+                  </a:lnTo>
+                  <a:lnTo>
+                    <a:pt x="5156821" y="918706"/>
+                  </a:lnTo>
+                  <a:lnTo>
+                    <a:pt x="5228444" y="923380"/>
+                  </a:lnTo>
+                  <a:lnTo>
+                    <a:pt x="5300066" y="928021"/>
+                  </a:lnTo>
+                  <a:lnTo>
+                    <a:pt x="5371689" y="932631"/>
+                  </a:lnTo>
+                  <a:lnTo>
+                    <a:pt x="5443311" y="937209"/>
+                  </a:lnTo>
+                  <a:lnTo>
+                    <a:pt x="5514934" y="941755"/>
+                  </a:lnTo>
+                  <a:lnTo>
+                    <a:pt x="5586557" y="946269"/>
+                  </a:lnTo>
+                  <a:lnTo>
+                    <a:pt x="5658179" y="950752"/>
+                  </a:lnTo>
+                  <a:lnTo>
+                    <a:pt x="5729802" y="955204"/>
+                  </a:lnTo>
+                  <a:lnTo>
+                    <a:pt x="5801424" y="959626"/>
+                  </a:lnTo>
+                  <a:lnTo>
+                    <a:pt x="5873047" y="964016"/>
+                  </a:lnTo>
+                  <a:lnTo>
+                    <a:pt x="5944669" y="968377"/>
+                  </a:lnTo>
+                  <a:lnTo>
+                    <a:pt x="6016292" y="972707"/>
+                  </a:lnTo>
+                  <a:lnTo>
+                    <a:pt x="6087914" y="977007"/>
+                  </a:lnTo>
+                  <a:lnTo>
+                    <a:pt x="6159537" y="981277"/>
+                  </a:lnTo>
+                  <a:lnTo>
+                    <a:pt x="6231159" y="985518"/>
+                  </a:lnTo>
+                  <a:lnTo>
+                    <a:pt x="6302782" y="989730"/>
+                  </a:lnTo>
+                  <a:lnTo>
+                    <a:pt x="6374404" y="993912"/>
+                  </a:lnTo>
+                  <a:lnTo>
+                    <a:pt x="6446027" y="998065"/>
+                  </a:lnTo>
+                  <a:lnTo>
+                    <a:pt x="6517649" y="1002190"/>
+                  </a:lnTo>
+                  <a:lnTo>
+                    <a:pt x="6589272" y="1006286"/>
+                  </a:lnTo>
+                  <a:lnTo>
+                    <a:pt x="6660894" y="1010353"/>
+                  </a:lnTo>
+                  <a:lnTo>
+                    <a:pt x="6732517" y="1014393"/>
+                  </a:lnTo>
+                  <a:lnTo>
+                    <a:pt x="6804139" y="1018405"/>
+                  </a:lnTo>
+                  <a:lnTo>
+                    <a:pt x="6875762" y="1022388"/>
+                  </a:lnTo>
+                  <a:lnTo>
+                    <a:pt x="6947385" y="1026344"/>
+                  </a:lnTo>
+                  <a:lnTo>
+                    <a:pt x="7019007" y="1030273"/>
+                  </a:lnTo>
+                  <a:lnTo>
+                    <a:pt x="7090630" y="1034175"/>
                   </a:lnTo>
                 </a:path>
               </a:pathLst>
@@ -4001,309 +4001,309 @@
           </p:nvSpPr>
           <p:spPr>
             <a:xfrm>
-              <a:off x="1172049" y="4442246"/>
-              <a:ext cx="7090630" cy="769746"/>
+              <a:off x="1172049" y="4443955"/>
+              <a:ext cx="7090630" cy="766922"/>
             </a:xfrm>
             <a:custGeom>
               <a:avLst/>
               <a:pathLst>
-                <a:path w="7090630" h="769746">
+                <a:path w="7090630" h="766922">
                   <a:moveTo>
-                    <a:pt x="7090630" y="769746"/>
+                    <a:pt x="7090630" y="766922"/>
                   </a:moveTo>
                   <a:lnTo>
-                    <a:pt x="7019007" y="764361"/>
-                  </a:lnTo>
-                  <a:lnTo>
-                    <a:pt x="6947385" y="758893"/>
-                  </a:lnTo>
-                  <a:lnTo>
-                    <a:pt x="6875762" y="753339"/>
-                  </a:lnTo>
-                  <a:lnTo>
-                    <a:pt x="6804139" y="747699"/>
-                  </a:lnTo>
-                  <a:lnTo>
-                    <a:pt x="6732517" y="741971"/>
-                  </a:lnTo>
-                  <a:lnTo>
-                    <a:pt x="6660894" y="736154"/>
-                  </a:lnTo>
-                  <a:lnTo>
-                    <a:pt x="6589272" y="730246"/>
-                  </a:lnTo>
-                  <a:lnTo>
-                    <a:pt x="6517649" y="724245"/>
-                  </a:lnTo>
-                  <a:lnTo>
-                    <a:pt x="6446027" y="718151"/>
-                  </a:lnTo>
-                  <a:lnTo>
-                    <a:pt x="6374404" y="711962"/>
-                  </a:lnTo>
-                  <a:lnTo>
-                    <a:pt x="6302782" y="705677"/>
-                  </a:lnTo>
-                  <a:lnTo>
-                    <a:pt x="6231159" y="699293"/>
-                  </a:lnTo>
-                  <a:lnTo>
-                    <a:pt x="6159537" y="692810"/>
-                  </a:lnTo>
-                  <a:lnTo>
-                    <a:pt x="6087914" y="686226"/>
-                  </a:lnTo>
-                  <a:lnTo>
-                    <a:pt x="6016292" y="679540"/>
-                  </a:lnTo>
-                  <a:lnTo>
-                    <a:pt x="5944669" y="672748"/>
-                  </a:lnTo>
-                  <a:lnTo>
-                    <a:pt x="5873047" y="665851"/>
-                  </a:lnTo>
-                  <a:lnTo>
-                    <a:pt x="5801424" y="658847"/>
-                  </a:lnTo>
-                  <a:lnTo>
-                    <a:pt x="5729802" y="651733"/>
-                  </a:lnTo>
-                  <a:lnTo>
-                    <a:pt x="5658179" y="644508"/>
-                  </a:lnTo>
-                  <a:lnTo>
-                    <a:pt x="5586557" y="637171"/>
-                  </a:lnTo>
-                  <a:lnTo>
-                    <a:pt x="5514934" y="629719"/>
-                  </a:lnTo>
-                  <a:lnTo>
-                    <a:pt x="5443311" y="622151"/>
-                  </a:lnTo>
-                  <a:lnTo>
-                    <a:pt x="5371689" y="614465"/>
-                  </a:lnTo>
-                  <a:lnTo>
-                    <a:pt x="5300066" y="606659"/>
-                  </a:lnTo>
-                  <a:lnTo>
-                    <a:pt x="5228444" y="598731"/>
-                  </a:lnTo>
-                  <a:lnTo>
-                    <a:pt x="5156821" y="590680"/>
-                  </a:lnTo>
-                  <a:lnTo>
-                    <a:pt x="5085199" y="582503"/>
-                  </a:lnTo>
-                  <a:lnTo>
-                    <a:pt x="5013576" y="574199"/>
-                  </a:lnTo>
-                  <a:lnTo>
-                    <a:pt x="4941954" y="565765"/>
-                  </a:lnTo>
-                  <a:lnTo>
-                    <a:pt x="4870331" y="557200"/>
-                  </a:lnTo>
-                  <a:lnTo>
-                    <a:pt x="4798709" y="548501"/>
-                  </a:lnTo>
-                  <a:lnTo>
-                    <a:pt x="4727086" y="539666"/>
-                  </a:lnTo>
-                  <a:lnTo>
-                    <a:pt x="4655464" y="530694"/>
-                  </a:lnTo>
-                  <a:lnTo>
-                    <a:pt x="4583841" y="521581"/>
-                  </a:lnTo>
-                  <a:lnTo>
-                    <a:pt x="4512219" y="512327"/>
-                  </a:lnTo>
-                  <a:lnTo>
-                    <a:pt x="4440596" y="502928"/>
-                  </a:lnTo>
-                  <a:lnTo>
-                    <a:pt x="4368974" y="493383"/>
-                  </a:lnTo>
-                  <a:lnTo>
-                    <a:pt x="4297351" y="483688"/>
-                  </a:lnTo>
-                  <a:lnTo>
-                    <a:pt x="4225729" y="473843"/>
-                  </a:lnTo>
-                  <a:lnTo>
-                    <a:pt x="4154106" y="463844"/>
-                  </a:lnTo>
-                  <a:lnTo>
-                    <a:pt x="4082483" y="453689"/>
-                  </a:lnTo>
-                  <a:lnTo>
-                    <a:pt x="4010861" y="443376"/>
-                  </a:lnTo>
-                  <a:lnTo>
-                    <a:pt x="3939238" y="432902"/>
-                  </a:lnTo>
-                  <a:lnTo>
-                    <a:pt x="3867616" y="422264"/>
-                  </a:lnTo>
-                  <a:lnTo>
-                    <a:pt x="3795993" y="411461"/>
-                  </a:lnTo>
-                  <a:lnTo>
-                    <a:pt x="3724371" y="400489"/>
-                  </a:lnTo>
-                  <a:lnTo>
-                    <a:pt x="3652748" y="389346"/>
-                  </a:lnTo>
-                  <a:lnTo>
-                    <a:pt x="3581126" y="378030"/>
-                  </a:lnTo>
-                  <a:lnTo>
-                    <a:pt x="3509503" y="366537"/>
-                  </a:lnTo>
-                  <a:lnTo>
-                    <a:pt x="3437881" y="354864"/>
-                  </a:lnTo>
-                  <a:lnTo>
-                    <a:pt x="3366258" y="343010"/>
-                  </a:lnTo>
-                  <a:lnTo>
-                    <a:pt x="3294636" y="330971"/>
-                  </a:lnTo>
-                  <a:lnTo>
-                    <a:pt x="3223013" y="318743"/>
-                  </a:lnTo>
-                  <a:lnTo>
-                    <a:pt x="3151391" y="306326"/>
-                  </a:lnTo>
-                  <a:lnTo>
-                    <a:pt x="3079768" y="293714"/>
-                  </a:lnTo>
-                  <a:lnTo>
-                    <a:pt x="3008146" y="283452"/>
-                  </a:lnTo>
-                  <a:lnTo>
-                    <a:pt x="2936523" y="277624"/>
-                  </a:lnTo>
-                  <a:lnTo>
-                    <a:pt x="2864901" y="271755"/>
-                  </a:lnTo>
-                  <a:lnTo>
-                    <a:pt x="2793278" y="265846"/>
-                  </a:lnTo>
-                  <a:lnTo>
-                    <a:pt x="2721655" y="259895"/>
-                  </a:lnTo>
-                  <a:lnTo>
-                    <a:pt x="2650033" y="253902"/>
-                  </a:lnTo>
-                  <a:lnTo>
-                    <a:pt x="2578410" y="247867"/>
-                  </a:lnTo>
-                  <a:lnTo>
-                    <a:pt x="2506788" y="241790"/>
-                  </a:lnTo>
-                  <a:lnTo>
-                    <a:pt x="2435165" y="235670"/>
-                  </a:lnTo>
-                  <a:lnTo>
-                    <a:pt x="2363543" y="229508"/>
-                  </a:lnTo>
-                  <a:lnTo>
-                    <a:pt x="2291920" y="223302"/>
-                  </a:lnTo>
-                  <a:lnTo>
-                    <a:pt x="2220298" y="217052"/>
-                  </a:lnTo>
-                  <a:lnTo>
-                    <a:pt x="2148675" y="210759"/>
-                  </a:lnTo>
-                  <a:lnTo>
-                    <a:pt x="2077053" y="204422"/>
-                  </a:lnTo>
-                  <a:lnTo>
-                    <a:pt x="2005430" y="198041"/>
-                  </a:lnTo>
-                  <a:lnTo>
-                    <a:pt x="1933808" y="191614"/>
-                  </a:lnTo>
-                  <a:lnTo>
-                    <a:pt x="1862185" y="185143"/>
-                  </a:lnTo>
-                  <a:lnTo>
-                    <a:pt x="1790563" y="178626"/>
-                  </a:lnTo>
-                  <a:lnTo>
-                    <a:pt x="1718940" y="172064"/>
-                  </a:lnTo>
-                  <a:lnTo>
-                    <a:pt x="1647318" y="165456"/>
-                  </a:lnTo>
-                  <a:lnTo>
-                    <a:pt x="1575695" y="158801"/>
-                  </a:lnTo>
-                  <a:lnTo>
-                    <a:pt x="1504073" y="152100"/>
-                  </a:lnTo>
-                  <a:lnTo>
-                    <a:pt x="1432450" y="145351"/>
-                  </a:lnTo>
-                  <a:lnTo>
-                    <a:pt x="1360827" y="138556"/>
-                  </a:lnTo>
-                  <a:lnTo>
-                    <a:pt x="1289205" y="131713"/>
-                  </a:lnTo>
-                  <a:lnTo>
-                    <a:pt x="1217582" y="124822"/>
-                  </a:lnTo>
-                  <a:lnTo>
-                    <a:pt x="1145960" y="117882"/>
-                  </a:lnTo>
-                  <a:lnTo>
-                    <a:pt x="1074337" y="110894"/>
-                  </a:lnTo>
-                  <a:lnTo>
-                    <a:pt x="1002715" y="103857"/>
-                  </a:lnTo>
-                  <a:lnTo>
-                    <a:pt x="931092" y="96771"/>
-                  </a:lnTo>
-                  <a:lnTo>
-                    <a:pt x="859470" y="89635"/>
-                  </a:lnTo>
-                  <a:lnTo>
-                    <a:pt x="787847" y="82449"/>
-                  </a:lnTo>
-                  <a:lnTo>
-                    <a:pt x="716225" y="75212"/>
-                  </a:lnTo>
-                  <a:lnTo>
-                    <a:pt x="644602" y="67925"/>
-                  </a:lnTo>
-                  <a:lnTo>
-                    <a:pt x="572980" y="60587"/>
-                  </a:lnTo>
-                  <a:lnTo>
-                    <a:pt x="501357" y="53197"/>
-                  </a:lnTo>
-                  <a:lnTo>
-                    <a:pt x="429735" y="45756"/>
-                  </a:lnTo>
-                  <a:lnTo>
-                    <a:pt x="358112" y="38262"/>
-                  </a:lnTo>
-                  <a:lnTo>
-                    <a:pt x="286490" y="30716"/>
-                  </a:lnTo>
-                  <a:lnTo>
-                    <a:pt x="214867" y="23117"/>
-                  </a:lnTo>
-                  <a:lnTo>
-                    <a:pt x="143245" y="15465"/>
-                  </a:lnTo>
-                  <a:lnTo>
-                    <a:pt x="71622" y="7759"/>
+                    <a:pt x="7019007" y="761540"/>
+                  </a:lnTo>
+                  <a:lnTo>
+                    <a:pt x="6947385" y="756075"/>
+                  </a:lnTo>
+                  <a:lnTo>
+                    <a:pt x="6875762" y="750525"/>
+                  </a:lnTo>
+                  <a:lnTo>
+                    <a:pt x="6804139" y="744888"/>
+                  </a:lnTo>
+                  <a:lnTo>
+                    <a:pt x="6732517" y="739164"/>
+                  </a:lnTo>
+                  <a:lnTo>
+                    <a:pt x="6660894" y="733351"/>
+                  </a:lnTo>
+                  <a:lnTo>
+                    <a:pt x="6589272" y="727448"/>
+                  </a:lnTo>
+                  <a:lnTo>
+                    <a:pt x="6517649" y="721453"/>
+                  </a:lnTo>
+                  <a:lnTo>
+                    <a:pt x="6446027" y="715365"/>
+                  </a:lnTo>
+                  <a:lnTo>
+                    <a:pt x="6374404" y="709182"/>
+                  </a:lnTo>
+                  <a:lnTo>
+                    <a:pt x="6302782" y="702904"/>
+                  </a:lnTo>
+                  <a:lnTo>
+                    <a:pt x="6231159" y="696527"/>
+                  </a:lnTo>
+                  <a:lnTo>
+                    <a:pt x="6159537" y="690052"/>
+                  </a:lnTo>
+                  <a:lnTo>
+                    <a:pt x="6087914" y="683476"/>
+                  </a:lnTo>
+                  <a:lnTo>
+                    <a:pt x="6016292" y="676798"/>
+                  </a:lnTo>
+                  <a:lnTo>
+                    <a:pt x="5944669" y="670016"/>
+                  </a:lnTo>
+                  <a:lnTo>
+                    <a:pt x="5873047" y="663128"/>
+                  </a:lnTo>
+                  <a:lnTo>
+                    <a:pt x="5801424" y="656134"/>
+                  </a:lnTo>
+                  <a:lnTo>
+                    <a:pt x="5729802" y="649031"/>
+                  </a:lnTo>
+                  <a:lnTo>
+                    <a:pt x="5658179" y="641817"/>
+                  </a:lnTo>
+                  <a:lnTo>
+                    <a:pt x="5586557" y="634492"/>
+                  </a:lnTo>
+                  <a:lnTo>
+                    <a:pt x="5514934" y="627053"/>
+                  </a:lnTo>
+                  <a:lnTo>
+                    <a:pt x="5443311" y="619498"/>
+                  </a:lnTo>
+                  <a:lnTo>
+                    <a:pt x="5371689" y="611826"/>
+                  </a:lnTo>
+                  <a:lnTo>
+                    <a:pt x="5300066" y="604034"/>
+                  </a:lnTo>
+                  <a:lnTo>
+                    <a:pt x="5228444" y="596122"/>
+                  </a:lnTo>
+                  <a:lnTo>
+                    <a:pt x="5156821" y="588086"/>
+                  </a:lnTo>
+                  <a:lnTo>
+                    <a:pt x="5085199" y="579926"/>
+                  </a:lnTo>
+                  <a:lnTo>
+                    <a:pt x="5013576" y="571639"/>
+                  </a:lnTo>
+                  <a:lnTo>
+                    <a:pt x="4941954" y="563223"/>
+                  </a:lnTo>
+                  <a:lnTo>
+                    <a:pt x="4870331" y="554676"/>
+                  </a:lnTo>
+                  <a:lnTo>
+                    <a:pt x="4798709" y="545997"/>
+                  </a:lnTo>
+                  <a:lnTo>
+                    <a:pt x="4727086" y="537183"/>
+                  </a:lnTo>
+                  <a:lnTo>
+                    <a:pt x="4655464" y="528231"/>
+                  </a:lnTo>
+                  <a:lnTo>
+                    <a:pt x="4583841" y="519141"/>
+                  </a:lnTo>
+                  <a:lnTo>
+                    <a:pt x="4512219" y="509910"/>
+                  </a:lnTo>
+                  <a:lnTo>
+                    <a:pt x="4440596" y="500535"/>
+                  </a:lnTo>
+                  <a:lnTo>
+                    <a:pt x="4368974" y="491014"/>
+                  </a:lnTo>
+                  <a:lnTo>
+                    <a:pt x="4297351" y="481346"/>
+                  </a:lnTo>
+                  <a:lnTo>
+                    <a:pt x="4225729" y="471527"/>
+                  </a:lnTo>
+                  <a:lnTo>
+                    <a:pt x="4154106" y="461556"/>
+                  </a:lnTo>
+                  <a:lnTo>
+                    <a:pt x="4082483" y="451429"/>
+                  </a:lnTo>
+                  <a:lnTo>
+                    <a:pt x="4010861" y="441146"/>
+                  </a:lnTo>
+                  <a:lnTo>
+                    <a:pt x="3939238" y="430702"/>
+                  </a:lnTo>
+                  <a:lnTo>
+                    <a:pt x="3867616" y="420097"/>
+                  </a:lnTo>
+                  <a:lnTo>
+                    <a:pt x="3795993" y="409326"/>
+                  </a:lnTo>
+                  <a:lnTo>
+                    <a:pt x="3724371" y="398389"/>
+                  </a:lnTo>
+                  <a:lnTo>
+                    <a:pt x="3652748" y="387281"/>
+                  </a:lnTo>
+                  <a:lnTo>
+                    <a:pt x="3581126" y="376001"/>
+                  </a:lnTo>
+                  <a:lnTo>
+                    <a:pt x="3509503" y="364545"/>
+                  </a:lnTo>
+                  <a:lnTo>
+                    <a:pt x="3437881" y="352912"/>
+                  </a:lnTo>
+                  <a:lnTo>
+                    <a:pt x="3366258" y="341097"/>
+                  </a:lnTo>
+                  <a:lnTo>
+                    <a:pt x="3294636" y="329099"/>
+                  </a:lnTo>
+                  <a:lnTo>
+                    <a:pt x="3223013" y="316915"/>
+                  </a:lnTo>
+                  <a:lnTo>
+                    <a:pt x="3151391" y="304542"/>
+                  </a:lnTo>
+                  <a:lnTo>
+                    <a:pt x="3079768" y="291976"/>
+                  </a:lnTo>
+                  <a:lnTo>
+                    <a:pt x="3008146" y="281754"/>
+                  </a:lnTo>
+                  <a:lnTo>
+                    <a:pt x="2936523" y="275957"/>
+                  </a:lnTo>
+                  <a:lnTo>
+                    <a:pt x="2864901" y="270119"/>
+                  </a:lnTo>
+                  <a:lnTo>
+                    <a:pt x="2793278" y="264240"/>
+                  </a:lnTo>
+                  <a:lnTo>
+                    <a:pt x="2721655" y="258321"/>
+                  </a:lnTo>
+                  <a:lnTo>
+                    <a:pt x="2650033" y="252360"/>
+                  </a:lnTo>
+                  <a:lnTo>
+                    <a:pt x="2578410" y="246358"/>
+                  </a:lnTo>
+                  <a:lnTo>
+                    <a:pt x="2506788" y="240314"/>
+                  </a:lnTo>
+                  <a:lnTo>
+                    <a:pt x="2435165" y="234228"/>
+                  </a:lnTo>
+                  <a:lnTo>
+                    <a:pt x="2363543" y="228099"/>
+                  </a:lnTo>
+                  <a:lnTo>
+                    <a:pt x="2291920" y="221928"/>
+                  </a:lnTo>
+                  <a:lnTo>
+                    <a:pt x="2220298" y="215713"/>
+                  </a:lnTo>
+                  <a:lnTo>
+                    <a:pt x="2148675" y="209455"/>
+                  </a:lnTo>
+                  <a:lnTo>
+                    <a:pt x="2077053" y="203154"/>
+                  </a:lnTo>
+                  <a:lnTo>
+                    <a:pt x="2005430" y="196809"/>
+                  </a:lnTo>
+                  <a:lnTo>
+                    <a:pt x="1933808" y="190419"/>
+                  </a:lnTo>
+                  <a:lnTo>
+                    <a:pt x="1862185" y="183985"/>
+                  </a:lnTo>
+                  <a:lnTo>
+                    <a:pt x="1790563" y="177506"/>
+                  </a:lnTo>
+                  <a:lnTo>
+                    <a:pt x="1718940" y="170982"/>
+                  </a:lnTo>
+                  <a:lnTo>
+                    <a:pt x="1647318" y="164412"/>
+                  </a:lnTo>
+                  <a:lnTo>
+                    <a:pt x="1575695" y="157797"/>
+                  </a:lnTo>
+                  <a:lnTo>
+                    <a:pt x="1504073" y="151135"/>
+                  </a:lnTo>
+                  <a:lnTo>
+                    <a:pt x="1432450" y="144427"/>
+                  </a:lnTo>
+                  <a:lnTo>
+                    <a:pt x="1360827" y="137673"/>
+                  </a:lnTo>
+                  <a:lnTo>
+                    <a:pt x="1289205" y="130871"/>
+                  </a:lnTo>
+                  <a:lnTo>
+                    <a:pt x="1217582" y="124022"/>
+                  </a:lnTo>
+                  <a:lnTo>
+                    <a:pt x="1145960" y="117125"/>
+                  </a:lnTo>
+                  <a:lnTo>
+                    <a:pt x="1074337" y="110180"/>
+                  </a:lnTo>
+                  <a:lnTo>
+                    <a:pt x="1002715" y="103186"/>
+                  </a:lnTo>
+                  <a:lnTo>
+                    <a:pt x="931092" y="96144"/>
+                  </a:lnTo>
+                  <a:lnTo>
+                    <a:pt x="859470" y="89052"/>
+                  </a:lnTo>
+                  <a:lnTo>
+                    <a:pt x="787847" y="81912"/>
+                  </a:lnTo>
+                  <a:lnTo>
+                    <a:pt x="716225" y="74721"/>
+                  </a:lnTo>
+                  <a:lnTo>
+                    <a:pt x="644602" y="67480"/>
+                  </a:lnTo>
+                  <a:lnTo>
+                    <a:pt x="572980" y="60189"/>
+                  </a:lnTo>
+                  <a:lnTo>
+                    <a:pt x="501357" y="52847"/>
+                  </a:lnTo>
+                  <a:lnTo>
+                    <a:pt x="429735" y="45454"/>
+                  </a:lnTo>
+                  <a:lnTo>
+                    <a:pt x="358112" y="38009"/>
+                  </a:lnTo>
+                  <a:lnTo>
+                    <a:pt x="286490" y="30512"/>
+                  </a:lnTo>
+                  <a:lnTo>
+                    <a:pt x="214867" y="22964"/>
+                  </a:lnTo>
+                  <a:lnTo>
+                    <a:pt x="143245" y="15362"/>
+                  </a:lnTo>
+                  <a:lnTo>
+                    <a:pt x="71622" y="7707"/>
                   </a:lnTo>
                   <a:lnTo>
                     <a:pt x="0" y="0"/>
@@ -4326,312 +4326,312 @@
           </p:nvSpPr>
           <p:spPr>
             <a:xfrm>
-              <a:off x="1172049" y="4222565"/>
-              <a:ext cx="7090630" cy="895573"/>
+              <a:off x="1172049" y="4225195"/>
+              <a:ext cx="7090630" cy="891783"/>
             </a:xfrm>
             <a:custGeom>
               <a:avLst/>
               <a:pathLst>
-                <a:path w="7090630" h="895573">
+                <a:path w="7090630" h="891783">
                   <a:moveTo>
                     <a:pt x="0" y="0"/>
                   </a:moveTo>
                   <a:lnTo>
-                    <a:pt x="71622" y="14903"/>
-                  </a:lnTo>
-                  <a:lnTo>
-                    <a:pt x="143245" y="29640"/>
-                  </a:lnTo>
-                  <a:lnTo>
-                    <a:pt x="214867" y="44213"/>
-                  </a:lnTo>
-                  <a:lnTo>
-                    <a:pt x="286490" y="58623"/>
-                  </a:lnTo>
-                  <a:lnTo>
-                    <a:pt x="358112" y="72872"/>
-                  </a:lnTo>
-                  <a:lnTo>
-                    <a:pt x="429735" y="86962"/>
-                  </a:lnTo>
-                  <a:lnTo>
-                    <a:pt x="501357" y="100895"/>
-                  </a:lnTo>
-                  <a:lnTo>
-                    <a:pt x="572980" y="114672"/>
-                  </a:lnTo>
-                  <a:lnTo>
-                    <a:pt x="644602" y="128295"/>
-                  </a:lnTo>
-                  <a:lnTo>
-                    <a:pt x="716225" y="141766"/>
-                  </a:lnTo>
-                  <a:lnTo>
-                    <a:pt x="787847" y="155087"/>
-                  </a:lnTo>
-                  <a:lnTo>
-                    <a:pt x="859470" y="168259"/>
-                  </a:lnTo>
-                  <a:lnTo>
-                    <a:pt x="931092" y="181284"/>
-                  </a:lnTo>
-                  <a:lnTo>
-                    <a:pt x="1002715" y="194163"/>
-                  </a:lnTo>
-                  <a:lnTo>
-                    <a:pt x="1074337" y="206899"/>
-                  </a:lnTo>
-                  <a:lnTo>
-                    <a:pt x="1145960" y="219492"/>
-                  </a:lnTo>
-                  <a:lnTo>
-                    <a:pt x="1217582" y="231945"/>
-                  </a:lnTo>
-                  <a:lnTo>
-                    <a:pt x="1289205" y="244258"/>
-                  </a:lnTo>
-                  <a:lnTo>
-                    <a:pt x="1360827" y="256435"/>
-                  </a:lnTo>
-                  <a:lnTo>
-                    <a:pt x="1432450" y="268475"/>
-                  </a:lnTo>
-                  <a:lnTo>
-                    <a:pt x="1504073" y="280381"/>
-                  </a:lnTo>
-                  <a:lnTo>
-                    <a:pt x="1575695" y="292153"/>
-                  </a:lnTo>
-                  <a:lnTo>
-                    <a:pt x="1647318" y="303795"/>
-                  </a:lnTo>
-                  <a:lnTo>
-                    <a:pt x="1718940" y="315306"/>
-                  </a:lnTo>
-                  <a:lnTo>
-                    <a:pt x="1790563" y="326689"/>
-                  </a:lnTo>
-                  <a:lnTo>
-                    <a:pt x="1862185" y="337945"/>
-                  </a:lnTo>
-                  <a:lnTo>
-                    <a:pt x="1933808" y="349075"/>
-                  </a:lnTo>
-                  <a:lnTo>
-                    <a:pt x="2005430" y="360080"/>
-                  </a:lnTo>
-                  <a:lnTo>
-                    <a:pt x="2077053" y="370963"/>
-                  </a:lnTo>
-                  <a:lnTo>
-                    <a:pt x="2148675" y="381725"/>
-                  </a:lnTo>
-                  <a:lnTo>
-                    <a:pt x="2220298" y="392366"/>
-                  </a:lnTo>
-                  <a:lnTo>
-                    <a:pt x="2291920" y="402888"/>
-                  </a:lnTo>
-                  <a:lnTo>
-                    <a:pt x="2363543" y="413293"/>
-                  </a:lnTo>
-                  <a:lnTo>
-                    <a:pt x="2435165" y="423582"/>
-                  </a:lnTo>
-                  <a:lnTo>
-                    <a:pt x="2506788" y="433755"/>
-                  </a:lnTo>
-                  <a:lnTo>
-                    <a:pt x="2578410" y="443816"/>
-                  </a:lnTo>
-                  <a:lnTo>
-                    <a:pt x="2650033" y="453764"/>
-                  </a:lnTo>
-                  <a:lnTo>
-                    <a:pt x="2721655" y="463600"/>
-                  </a:lnTo>
-                  <a:lnTo>
-                    <a:pt x="2793278" y="473327"/>
-                  </a:lnTo>
-                  <a:lnTo>
-                    <a:pt x="2864901" y="482945"/>
-                  </a:lnTo>
-                  <a:lnTo>
-                    <a:pt x="2936523" y="492456"/>
-                  </a:lnTo>
-                  <a:lnTo>
-                    <a:pt x="3008146" y="501861"/>
-                  </a:lnTo>
-                  <a:lnTo>
-                    <a:pt x="3079768" y="511161"/>
-                  </a:lnTo>
-                  <a:lnTo>
-                    <a:pt x="3151391" y="520357"/>
-                  </a:lnTo>
-                  <a:lnTo>
-                    <a:pt x="3223013" y="529450"/>
-                  </a:lnTo>
-                  <a:lnTo>
-                    <a:pt x="3294636" y="538441"/>
-                  </a:lnTo>
-                  <a:lnTo>
-                    <a:pt x="3366258" y="547333"/>
-                  </a:lnTo>
-                  <a:lnTo>
-                    <a:pt x="3437881" y="556124"/>
-                  </a:lnTo>
-                  <a:lnTo>
-                    <a:pt x="3509503" y="564818"/>
-                  </a:lnTo>
-                  <a:lnTo>
-                    <a:pt x="3581126" y="573415"/>
-                  </a:lnTo>
-                  <a:lnTo>
-                    <a:pt x="3652748" y="581916"/>
-                  </a:lnTo>
-                  <a:lnTo>
-                    <a:pt x="3724371" y="590321"/>
-                  </a:lnTo>
-                  <a:lnTo>
-                    <a:pt x="3795993" y="598633"/>
-                  </a:lnTo>
-                  <a:lnTo>
-                    <a:pt x="3867616" y="606852"/>
-                  </a:lnTo>
-                  <a:lnTo>
-                    <a:pt x="3939238" y="614980"/>
-                  </a:lnTo>
-                  <a:lnTo>
-                    <a:pt x="4010861" y="623016"/>
-                  </a:lnTo>
-                  <a:lnTo>
-                    <a:pt x="4082483" y="630963"/>
-                  </a:lnTo>
-                  <a:lnTo>
-                    <a:pt x="4154106" y="638821"/>
-                  </a:lnTo>
-                  <a:lnTo>
-                    <a:pt x="4225729" y="646591"/>
-                  </a:lnTo>
-                  <a:lnTo>
-                    <a:pt x="4297351" y="654275"/>
-                  </a:lnTo>
-                  <a:lnTo>
-                    <a:pt x="4368974" y="661873"/>
-                  </a:lnTo>
-                  <a:lnTo>
-                    <a:pt x="4440596" y="669386"/>
-                  </a:lnTo>
-                  <a:lnTo>
-                    <a:pt x="4512219" y="676815"/>
-                  </a:lnTo>
-                  <a:lnTo>
-                    <a:pt x="4583841" y="684161"/>
-                  </a:lnTo>
-                  <a:lnTo>
-                    <a:pt x="4655464" y="691425"/>
-                  </a:lnTo>
-                  <a:lnTo>
-                    <a:pt x="4727086" y="698608"/>
-                  </a:lnTo>
-                  <a:lnTo>
-                    <a:pt x="4798709" y="705710"/>
-                  </a:lnTo>
-                  <a:lnTo>
-                    <a:pt x="4870331" y="712734"/>
-                  </a:lnTo>
-                  <a:lnTo>
-                    <a:pt x="4941954" y="719679"/>
-                  </a:lnTo>
-                  <a:lnTo>
-                    <a:pt x="5013576" y="726546"/>
-                  </a:lnTo>
-                  <a:lnTo>
-                    <a:pt x="5085199" y="733337"/>
-                  </a:lnTo>
-                  <a:lnTo>
-                    <a:pt x="5156821" y="740052"/>
-                  </a:lnTo>
-                  <a:lnTo>
-                    <a:pt x="5228444" y="746692"/>
-                  </a:lnTo>
-                  <a:lnTo>
-                    <a:pt x="5300066" y="753258"/>
-                  </a:lnTo>
-                  <a:lnTo>
-                    <a:pt x="5371689" y="759750"/>
-                  </a:lnTo>
-                  <a:lnTo>
-                    <a:pt x="5443311" y="766170"/>
-                  </a:lnTo>
-                  <a:lnTo>
-                    <a:pt x="5514934" y="772518"/>
-                  </a:lnTo>
-                  <a:lnTo>
-                    <a:pt x="5586557" y="778796"/>
-                  </a:lnTo>
-                  <a:lnTo>
-                    <a:pt x="5658179" y="785003"/>
-                  </a:lnTo>
-                  <a:lnTo>
-                    <a:pt x="5729802" y="791141"/>
-                  </a:lnTo>
-                  <a:lnTo>
-                    <a:pt x="5801424" y="797210"/>
-                  </a:lnTo>
-                  <a:lnTo>
-                    <a:pt x="5873047" y="803212"/>
-                  </a:lnTo>
-                  <a:lnTo>
-                    <a:pt x="5944669" y="809147"/>
-                  </a:lnTo>
-                  <a:lnTo>
-                    <a:pt x="6016292" y="815015"/>
-                  </a:lnTo>
-                  <a:lnTo>
-                    <a:pt x="6087914" y="820818"/>
-                  </a:lnTo>
-                  <a:lnTo>
-                    <a:pt x="6159537" y="826556"/>
-                  </a:lnTo>
-                  <a:lnTo>
-                    <a:pt x="6231159" y="832230"/>
-                  </a:lnTo>
-                  <a:lnTo>
-                    <a:pt x="6302782" y="837841"/>
-                  </a:lnTo>
-                  <a:lnTo>
-                    <a:pt x="6374404" y="843389"/>
-                  </a:lnTo>
-                  <a:lnTo>
-                    <a:pt x="6446027" y="848875"/>
-                  </a:lnTo>
-                  <a:lnTo>
-                    <a:pt x="6517649" y="854299"/>
-                  </a:lnTo>
-                  <a:lnTo>
-                    <a:pt x="6589272" y="859664"/>
-                  </a:lnTo>
-                  <a:lnTo>
-                    <a:pt x="6660894" y="864968"/>
-                  </a:lnTo>
-                  <a:lnTo>
-                    <a:pt x="6732517" y="870213"/>
-                  </a:lnTo>
-                  <a:lnTo>
-                    <a:pt x="6804139" y="875399"/>
-                  </a:lnTo>
-                  <a:lnTo>
-                    <a:pt x="6875762" y="880528"/>
-                  </a:lnTo>
-                  <a:lnTo>
-                    <a:pt x="6947385" y="885599"/>
-                  </a:lnTo>
-                  <a:lnTo>
-                    <a:pt x="7019007" y="890614"/>
-                  </a:lnTo>
-                  <a:lnTo>
-                    <a:pt x="7090630" y="895573"/>
+                    <a:pt x="71622" y="14812"/>
+                  </a:lnTo>
+                  <a:lnTo>
+                    <a:pt x="143245" y="29461"/>
+                  </a:lnTo>
+                  <a:lnTo>
+                    <a:pt x="214867" y="43946"/>
+                  </a:lnTo>
+                  <a:lnTo>
+                    <a:pt x="286490" y="58270"/>
+                  </a:lnTo>
+                  <a:lnTo>
+                    <a:pt x="358112" y="72435"/>
+                  </a:lnTo>
+                  <a:lnTo>
+                    <a:pt x="429735" y="86443"/>
+                  </a:lnTo>
+                  <a:lnTo>
+                    <a:pt x="501357" y="100295"/>
+                  </a:lnTo>
+                  <a:lnTo>
+                    <a:pt x="572980" y="113992"/>
+                  </a:lnTo>
+                  <a:lnTo>
+                    <a:pt x="644602" y="127538"/>
+                  </a:lnTo>
+                  <a:lnTo>
+                    <a:pt x="716225" y="140932"/>
+                  </a:lnTo>
+                  <a:lnTo>
+                    <a:pt x="787847" y="154178"/>
+                  </a:lnTo>
+                  <a:lnTo>
+                    <a:pt x="859470" y="167277"/>
+                  </a:lnTo>
+                  <a:lnTo>
+                    <a:pt x="931092" y="180229"/>
+                  </a:lnTo>
+                  <a:lnTo>
+                    <a:pt x="1002715" y="193038"/>
+                  </a:lnTo>
+                  <a:lnTo>
+                    <a:pt x="1074337" y="205704"/>
+                  </a:lnTo>
+                  <a:lnTo>
+                    <a:pt x="1145960" y="218230"/>
+                  </a:lnTo>
+                  <a:lnTo>
+                    <a:pt x="1217582" y="230616"/>
+                  </a:lnTo>
+                  <a:lnTo>
+                    <a:pt x="1289205" y="242865"/>
+                  </a:lnTo>
+                  <a:lnTo>
+                    <a:pt x="1360827" y="254977"/>
+                  </a:lnTo>
+                  <a:lnTo>
+                    <a:pt x="1432450" y="266954"/>
+                  </a:lnTo>
+                  <a:lnTo>
+                    <a:pt x="1504073" y="278799"/>
+                  </a:lnTo>
+                  <a:lnTo>
+                    <a:pt x="1575695" y="290511"/>
+                  </a:lnTo>
+                  <a:lnTo>
+                    <a:pt x="1647318" y="302094"/>
+                  </a:lnTo>
+                  <a:lnTo>
+                    <a:pt x="1718940" y="313547"/>
+                  </a:lnTo>
+                  <a:lnTo>
+                    <a:pt x="1790563" y="324873"/>
+                  </a:lnTo>
+                  <a:lnTo>
+                    <a:pt x="1862185" y="336074"/>
+                  </a:lnTo>
+                  <a:lnTo>
+                    <a:pt x="1933808" y="347149"/>
+                  </a:lnTo>
+                  <a:lnTo>
+                    <a:pt x="2005430" y="358102"/>
+                  </a:lnTo>
+                  <a:lnTo>
+                    <a:pt x="2077053" y="368933"/>
+                  </a:lnTo>
+                  <a:lnTo>
+                    <a:pt x="2148675" y="379643"/>
+                  </a:lnTo>
+                  <a:lnTo>
+                    <a:pt x="2220298" y="390234"/>
+                  </a:lnTo>
+                  <a:lnTo>
+                    <a:pt x="2291920" y="400708"/>
+                  </a:lnTo>
+                  <a:lnTo>
+                    <a:pt x="2363543" y="411065"/>
+                  </a:lnTo>
+                  <a:lnTo>
+                    <a:pt x="2435165" y="421306"/>
+                  </a:lnTo>
+                  <a:lnTo>
+                    <a:pt x="2506788" y="431434"/>
+                  </a:lnTo>
+                  <a:lnTo>
+                    <a:pt x="2578410" y="441450"/>
+                  </a:lnTo>
+                  <a:lnTo>
+                    <a:pt x="2650033" y="451353"/>
+                  </a:lnTo>
+                  <a:lnTo>
+                    <a:pt x="2721655" y="461147"/>
+                  </a:lnTo>
+                  <a:lnTo>
+                    <a:pt x="2793278" y="470832"/>
+                  </a:lnTo>
+                  <a:lnTo>
+                    <a:pt x="2864901" y="480409"/>
+                  </a:lnTo>
+                  <a:lnTo>
+                    <a:pt x="2936523" y="489880"/>
+                  </a:lnTo>
+                  <a:lnTo>
+                    <a:pt x="3008146" y="499245"/>
+                  </a:lnTo>
+                  <a:lnTo>
+                    <a:pt x="3079768" y="508506"/>
+                  </a:lnTo>
+                  <a:lnTo>
+                    <a:pt x="3151391" y="517664"/>
+                  </a:lnTo>
+                  <a:lnTo>
+                    <a:pt x="3223013" y="526721"/>
+                  </a:lnTo>
+                  <a:lnTo>
+                    <a:pt x="3294636" y="535676"/>
+                  </a:lnTo>
+                  <a:lnTo>
+                    <a:pt x="3366258" y="544532"/>
+                  </a:lnTo>
+                  <a:lnTo>
+                    <a:pt x="3437881" y="553290"/>
+                  </a:lnTo>
+                  <a:lnTo>
+                    <a:pt x="3509503" y="561950"/>
+                  </a:lnTo>
+                  <a:lnTo>
+                    <a:pt x="3581126" y="570514"/>
+                  </a:lnTo>
+                  <a:lnTo>
+                    <a:pt x="3652748" y="578983"/>
+                  </a:lnTo>
+                  <a:lnTo>
+                    <a:pt x="3724371" y="587357"/>
+                  </a:lnTo>
+                  <a:lnTo>
+                    <a:pt x="3795993" y="595639"/>
+                  </a:lnTo>
+                  <a:lnTo>
+                    <a:pt x="3867616" y="603828"/>
+                  </a:lnTo>
+                  <a:lnTo>
+                    <a:pt x="3939238" y="611926"/>
+                  </a:lnTo>
+                  <a:lnTo>
+                    <a:pt x="4010861" y="619934"/>
+                  </a:lnTo>
+                  <a:lnTo>
+                    <a:pt x="4082483" y="627853"/>
+                  </a:lnTo>
+                  <a:lnTo>
+                    <a:pt x="4154106" y="635684"/>
+                  </a:lnTo>
+                  <a:lnTo>
+                    <a:pt x="4225729" y="643428"/>
+                  </a:lnTo>
+                  <a:lnTo>
+                    <a:pt x="4297351" y="651086"/>
+                  </a:lnTo>
+                  <a:lnTo>
+                    <a:pt x="4368974" y="658659"/>
+                  </a:lnTo>
+                  <a:lnTo>
+                    <a:pt x="4440596" y="666147"/>
+                  </a:lnTo>
+                  <a:lnTo>
+                    <a:pt x="4512219" y="673552"/>
+                  </a:lnTo>
+                  <a:lnTo>
+                    <a:pt x="4583841" y="680875"/>
+                  </a:lnTo>
+                  <a:lnTo>
+                    <a:pt x="4655464" y="688116"/>
+                  </a:lnTo>
+                  <a:lnTo>
+                    <a:pt x="4727086" y="695277"/>
+                  </a:lnTo>
+                  <a:lnTo>
+                    <a:pt x="4798709" y="702358"/>
+                  </a:lnTo>
+                  <a:lnTo>
+                    <a:pt x="4870331" y="709361"/>
+                  </a:lnTo>
+                  <a:lnTo>
+                    <a:pt x="4941954" y="716285"/>
+                  </a:lnTo>
+                  <a:lnTo>
+                    <a:pt x="5013576" y="723133"/>
+                  </a:lnTo>
+                  <a:lnTo>
+                    <a:pt x="5085199" y="729904"/>
+                  </a:lnTo>
+                  <a:lnTo>
+                    <a:pt x="5156821" y="736601"/>
+                  </a:lnTo>
+                  <a:lnTo>
+                    <a:pt x="5228444" y="743222"/>
+                  </a:lnTo>
+                  <a:lnTo>
+                    <a:pt x="5300066" y="749770"/>
+                  </a:lnTo>
+                  <a:lnTo>
+                    <a:pt x="5371689" y="756246"/>
+                  </a:lnTo>
+                  <a:lnTo>
+                    <a:pt x="5443311" y="762649"/>
+                  </a:lnTo>
+                  <a:lnTo>
+                    <a:pt x="5514934" y="768981"/>
+                  </a:lnTo>
+                  <a:lnTo>
+                    <a:pt x="5586557" y="775242"/>
+                  </a:lnTo>
+                  <a:lnTo>
+                    <a:pt x="5658179" y="781434"/>
+                  </a:lnTo>
+                  <a:lnTo>
+                    <a:pt x="5729802" y="787558"/>
+                  </a:lnTo>
+                  <a:lnTo>
+                    <a:pt x="5801424" y="793613"/>
+                  </a:lnTo>
+                  <a:lnTo>
+                    <a:pt x="5873047" y="799600"/>
+                  </a:lnTo>
+                  <a:lnTo>
+                    <a:pt x="5944669" y="805521"/>
+                  </a:lnTo>
+                  <a:lnTo>
+                    <a:pt x="6016292" y="811377"/>
+                  </a:lnTo>
+                  <a:lnTo>
+                    <a:pt x="6087914" y="817167"/>
+                  </a:lnTo>
+                  <a:lnTo>
+                    <a:pt x="6159537" y="822893"/>
+                  </a:lnTo>
+                  <a:lnTo>
+                    <a:pt x="6231159" y="828555"/>
+                  </a:lnTo>
+                  <a:lnTo>
+                    <a:pt x="6302782" y="834154"/>
+                  </a:lnTo>
+                  <a:lnTo>
+                    <a:pt x="6374404" y="839691"/>
+                  </a:lnTo>
+                  <a:lnTo>
+                    <a:pt x="6446027" y="845166"/>
+                  </a:lnTo>
+                  <a:lnTo>
+                    <a:pt x="6517649" y="850580"/>
+                  </a:lnTo>
+                  <a:lnTo>
+                    <a:pt x="6589272" y="855934"/>
+                  </a:lnTo>
+                  <a:lnTo>
+                    <a:pt x="6660894" y="861229"/>
+                  </a:lnTo>
+                  <a:lnTo>
+                    <a:pt x="6732517" y="866465"/>
+                  </a:lnTo>
+                  <a:lnTo>
+                    <a:pt x="6804139" y="871642"/>
+                  </a:lnTo>
+                  <a:lnTo>
+                    <a:pt x="6875762" y="876762"/>
+                  </a:lnTo>
+                  <a:lnTo>
+                    <a:pt x="6947385" y="881825"/>
+                  </a:lnTo>
+                  <a:lnTo>
+                    <a:pt x="7019007" y="886832"/>
+                  </a:lnTo>
+                  <a:lnTo>
+                    <a:pt x="7090630" y="891783"/>
                   </a:lnTo>
                 </a:path>
               </a:pathLst>
